--- a/sample-output/emirates-client-deck.pptx
+++ b/sample-output/emirates-client-deck.pptx
@@ -4090,7 +4090,7 @@
                   <a:srgbClr val="14181F"/>
                 </a:solidFill>
               </a:rPr>
-              <a:t>Billing schedule</a:t>
+              <a:t>Billing milestones</a:t>
             </a:r>
             <a:endParaRPr lang="en-US" sz="2200" dirty="0"/>
           </a:p>
@@ -4119,9 +4119,10 @@
             <a:tbl>
               <a:tblPr/>
               <a:tblGrid>
-                <a:gridCol w="3657600"/>
-                <a:gridCol w="3840480"/>
-                <a:gridCol w="3749040"/>
+                <a:gridCol w="1828800"/>
+                <a:gridCol w="3108960"/>
+                <a:gridCol w="2194560"/>
+                <a:gridCol w="4114800"/>
               </a:tblGrid>
               <a:tr h="0">
                 <a:tc>
@@ -4138,7 +4139,7 @@
                             <a:srgbClr val="5A6472"/>
                           </a:solidFill>
                         </a:rPr>
-                        <a:t>Period</a:t>
+                        <a:t>RA</a:t>
                       </a:r>
                       <a:endParaRPr lang="en-US" sz="900" dirty="0"/>
                     </a:p>
@@ -4199,7 +4200,7 @@
                             <a:srgbClr val="5A6472"/>
                           </a:solidFill>
                         </a:rPr>
-                        <a:t>Billing</a:t>
+                        <a:t>Due</a:t>
                       </a:r>
                       <a:endParaRPr lang="en-US" sz="900" dirty="0"/>
                     </a:p>
@@ -4260,7 +4261,7 @@
                             <a:srgbClr val="5A6472"/>
                           </a:solidFill>
                         </a:rPr>
-                        <a:t>Cumulative</a:t>
+                        <a:t>%</a:t>
                       </a:r>
                       <a:endParaRPr lang="en-US" sz="900" dirty="0"/>
                     </a:p>
@@ -4307,6 +4308,67 @@
                     </a:solidFill>
                   </a:tcPr>
                 </a:tc>
+                <a:tc>
+                  <a:txBody>
+                    <a:bodyPr/>
+                    <a:lstStyle/>
+                    <a:p>
+                      <a:pPr indent="0" marL="0">
+                        <a:buNone/>
+                      </a:pPr>
+                      <a:r>
+                        <a:rPr lang="en-US" sz="900" b="1" dirty="0">
+                          <a:solidFill>
+                            <a:srgbClr val="5A6472"/>
+                          </a:solidFill>
+                        </a:rPr>
+                        <a:t>Status</a:t>
+                      </a:r>
+                      <a:endParaRPr lang="en-US" sz="900" dirty="0"/>
+                    </a:p>
+                  </a:txBody>
+                  <a:tcPr marL="50800" marR="50800" marT="50800" marB="50800">
+                    <a:lnL w="6350" cap="flat" cmpd="sng" algn="ctr">
+                      <a:solidFill>
+                        <a:srgbClr val="E2E7EE"/>
+                      </a:solidFill>
+                      <a:prstDash val="solid"/>
+                      <a:round/>
+                      <a:headEnd type="none" w="med" len="med"/>
+                      <a:tailEnd type="none" w="med" len="med"/>
+                    </a:lnL>
+                    <a:lnR w="6350" cap="flat" cmpd="sng" algn="ctr">
+                      <a:solidFill>
+                        <a:srgbClr val="E2E7EE"/>
+                      </a:solidFill>
+                      <a:prstDash val="solid"/>
+                      <a:round/>
+                      <a:headEnd type="none" w="med" len="med"/>
+                      <a:tailEnd type="none" w="med" len="med"/>
+                    </a:lnR>
+                    <a:lnT w="6350" cap="flat" cmpd="sng" algn="ctr">
+                      <a:solidFill>
+                        <a:srgbClr val="E2E7EE"/>
+                      </a:solidFill>
+                      <a:prstDash val="solid"/>
+                      <a:round/>
+                      <a:headEnd type="none" w="med" len="med"/>
+                      <a:tailEnd type="none" w="med" len="med"/>
+                    </a:lnT>
+                    <a:lnB w="6350" cap="flat" cmpd="sng" algn="ctr">
+                      <a:solidFill>
+                        <a:srgbClr val="E2E7EE"/>
+                      </a:solidFill>
+                      <a:prstDash val="solid"/>
+                      <a:round/>
+                      <a:headEnd type="none" w="med" len="med"/>
+                      <a:tailEnd type="none" w="med" len="med"/>
+                    </a:lnB>
+                    <a:solidFill>
+                      <a:srgbClr val="F2F4F7"/>
+                    </a:solidFill>
+                  </a:tcPr>
+                </a:tc>
               </a:tr>
               <a:tr h="0">
                 <a:tc>
@@ -4323,123 +4385,181 @@
                             <a:srgbClr val="14181F"/>
                           </a:solidFill>
                         </a:rPr>
-                        <a:t>2025-06</a:t>
-                      </a:r>
-                      <a:endParaRPr lang="en-US" sz="900" dirty="0"/>
-                    </a:p>
-                  </a:txBody>
-                  <a:tcPr marL="50800" marR="50800" marT="50800" marB="50800">
-                    <a:lnL w="6350" cap="flat" cmpd="sng" algn="ctr">
-                      <a:solidFill>
-                        <a:srgbClr val="E2E7EE"/>
-                      </a:solidFill>
-                      <a:prstDash val="solid"/>
-                      <a:round/>
-                      <a:headEnd type="none" w="med" len="med"/>
-                      <a:tailEnd type="none" w="med" len="med"/>
-                    </a:lnL>
-                    <a:lnR w="6350" cap="flat" cmpd="sng" algn="ctr">
-                      <a:solidFill>
-                        <a:srgbClr val="E2E7EE"/>
-                      </a:solidFill>
-                      <a:prstDash val="solid"/>
-                      <a:round/>
-                      <a:headEnd type="none" w="med" len="med"/>
-                      <a:tailEnd type="none" w="med" len="med"/>
-                    </a:lnR>
-                    <a:lnT w="6350" cap="flat" cmpd="sng" algn="ctr">
-                      <a:solidFill>
-                        <a:srgbClr val="E2E7EE"/>
-                      </a:solidFill>
-                      <a:prstDash val="solid"/>
-                      <a:round/>
-                      <a:headEnd type="none" w="med" len="med"/>
-                      <a:tailEnd type="none" w="med" len="med"/>
-                    </a:lnT>
-                    <a:lnB w="6350" cap="flat" cmpd="sng" algn="ctr">
-                      <a:solidFill>
-                        <a:srgbClr val="E2E7EE"/>
-                      </a:solidFill>
-                      <a:prstDash val="solid"/>
-                      <a:round/>
-                      <a:headEnd type="none" w="med" len="med"/>
-                      <a:tailEnd type="none" w="med" len="med"/>
-                    </a:lnB>
-                  </a:tcPr>
-                </a:tc>
-                <a:tc>
-                  <a:txBody>
-                    <a:bodyPr/>
-                    <a:lstStyle/>
-                    <a:p>
-                      <a:pPr indent="0" marL="0">
-                        <a:buNone/>
-                      </a:pPr>
-                      <a:r>
-                        <a:rPr lang="en-US" sz="900" dirty="0">
-                          <a:solidFill>
-                            <a:srgbClr val="14181F"/>
-                          </a:solidFill>
-                        </a:rPr>
-                        <a:t>INR 0</a:t>
-                      </a:r>
-                      <a:endParaRPr lang="en-US" sz="900" dirty="0"/>
-                    </a:p>
-                  </a:txBody>
-                  <a:tcPr marL="50800" marR="50800" marT="50800" marB="50800">
-                    <a:lnL w="6350" cap="flat" cmpd="sng" algn="ctr">
-                      <a:solidFill>
-                        <a:srgbClr val="E2E7EE"/>
-                      </a:solidFill>
-                      <a:prstDash val="solid"/>
-                      <a:round/>
-                      <a:headEnd type="none" w="med" len="med"/>
-                      <a:tailEnd type="none" w="med" len="med"/>
-                    </a:lnL>
-                    <a:lnR w="6350" cap="flat" cmpd="sng" algn="ctr">
-                      <a:solidFill>
-                        <a:srgbClr val="E2E7EE"/>
-                      </a:solidFill>
-                      <a:prstDash val="solid"/>
-                      <a:round/>
-                      <a:headEnd type="none" w="med" len="med"/>
-                      <a:tailEnd type="none" w="med" len="med"/>
-                    </a:lnR>
-                    <a:lnT w="6350" cap="flat" cmpd="sng" algn="ctr">
-                      <a:solidFill>
-                        <a:srgbClr val="E2E7EE"/>
-                      </a:solidFill>
-                      <a:prstDash val="solid"/>
-                      <a:round/>
-                      <a:headEnd type="none" w="med" len="med"/>
-                      <a:tailEnd type="none" w="med" len="med"/>
-                    </a:lnT>
-                    <a:lnB w="6350" cap="flat" cmpd="sng" algn="ctr">
-                      <a:solidFill>
-                        <a:srgbClr val="E2E7EE"/>
-                      </a:solidFill>
-                      <a:prstDash val="solid"/>
-                      <a:round/>
-                      <a:headEnd type="none" w="med" len="med"/>
-                      <a:tailEnd type="none" w="med" len="med"/>
-                    </a:lnB>
-                  </a:tcPr>
-                </a:tc>
-                <a:tc>
-                  <a:txBody>
-                    <a:bodyPr/>
-                    <a:lstStyle/>
-                    <a:p>
-                      <a:pPr indent="0" marL="0">
-                        <a:buNone/>
-                      </a:pPr>
-                      <a:r>
-                        <a:rPr lang="en-US" sz="900" dirty="0">
-                          <a:solidFill>
-                            <a:srgbClr val="14181F"/>
-                          </a:solidFill>
-                        </a:rPr>
-                        <a:t>INR 0</a:t>
+                        <a:t>RA1</a:t>
+                      </a:r>
+                      <a:endParaRPr lang="en-US" sz="900" dirty="0"/>
+                    </a:p>
+                  </a:txBody>
+                  <a:tcPr marL="50800" marR="50800" marT="50800" marB="50800">
+                    <a:lnL w="6350" cap="flat" cmpd="sng" algn="ctr">
+                      <a:solidFill>
+                        <a:srgbClr val="E2E7EE"/>
+                      </a:solidFill>
+                      <a:prstDash val="solid"/>
+                      <a:round/>
+                      <a:headEnd type="none" w="med" len="med"/>
+                      <a:tailEnd type="none" w="med" len="med"/>
+                    </a:lnL>
+                    <a:lnR w="6350" cap="flat" cmpd="sng" algn="ctr">
+                      <a:solidFill>
+                        <a:srgbClr val="E2E7EE"/>
+                      </a:solidFill>
+                      <a:prstDash val="solid"/>
+                      <a:round/>
+                      <a:headEnd type="none" w="med" len="med"/>
+                      <a:tailEnd type="none" w="med" len="med"/>
+                    </a:lnR>
+                    <a:lnT w="6350" cap="flat" cmpd="sng" algn="ctr">
+                      <a:solidFill>
+                        <a:srgbClr val="E2E7EE"/>
+                      </a:solidFill>
+                      <a:prstDash val="solid"/>
+                      <a:round/>
+                      <a:headEnd type="none" w="med" len="med"/>
+                      <a:tailEnd type="none" w="med" len="med"/>
+                    </a:lnT>
+                    <a:lnB w="6350" cap="flat" cmpd="sng" algn="ctr">
+                      <a:solidFill>
+                        <a:srgbClr val="E2E7EE"/>
+                      </a:solidFill>
+                      <a:prstDash val="solid"/>
+                      <a:round/>
+                      <a:headEnd type="none" w="med" len="med"/>
+                      <a:tailEnd type="none" w="med" len="med"/>
+                    </a:lnB>
+                  </a:tcPr>
+                </a:tc>
+                <a:tc>
+                  <a:txBody>
+                    <a:bodyPr/>
+                    <a:lstStyle/>
+                    <a:p>
+                      <a:pPr indent="0" marL="0">
+                        <a:buNone/>
+                      </a:pPr>
+                      <a:r>
+                        <a:rPr lang="en-US" sz="900" dirty="0">
+                          <a:solidFill>
+                            <a:srgbClr val="14181F"/>
+                          </a:solidFill>
+                        </a:rPr>
+                        <a:t>2025-06-23</a:t>
+                      </a:r>
+                      <a:endParaRPr lang="en-US" sz="900" dirty="0"/>
+                    </a:p>
+                  </a:txBody>
+                  <a:tcPr marL="50800" marR="50800" marT="50800" marB="50800">
+                    <a:lnL w="6350" cap="flat" cmpd="sng" algn="ctr">
+                      <a:solidFill>
+                        <a:srgbClr val="E2E7EE"/>
+                      </a:solidFill>
+                      <a:prstDash val="solid"/>
+                      <a:round/>
+                      <a:headEnd type="none" w="med" len="med"/>
+                      <a:tailEnd type="none" w="med" len="med"/>
+                    </a:lnL>
+                    <a:lnR w="6350" cap="flat" cmpd="sng" algn="ctr">
+                      <a:solidFill>
+                        <a:srgbClr val="E2E7EE"/>
+                      </a:solidFill>
+                      <a:prstDash val="solid"/>
+                      <a:round/>
+                      <a:headEnd type="none" w="med" len="med"/>
+                      <a:tailEnd type="none" w="med" len="med"/>
+                    </a:lnR>
+                    <a:lnT w="6350" cap="flat" cmpd="sng" algn="ctr">
+                      <a:solidFill>
+                        <a:srgbClr val="E2E7EE"/>
+                      </a:solidFill>
+                      <a:prstDash val="solid"/>
+                      <a:round/>
+                      <a:headEnd type="none" w="med" len="med"/>
+                      <a:tailEnd type="none" w="med" len="med"/>
+                    </a:lnT>
+                    <a:lnB w="6350" cap="flat" cmpd="sng" algn="ctr">
+                      <a:solidFill>
+                        <a:srgbClr val="E2E7EE"/>
+                      </a:solidFill>
+                      <a:prstDash val="solid"/>
+                      <a:round/>
+                      <a:headEnd type="none" w="med" len="med"/>
+                      <a:tailEnd type="none" w="med" len="med"/>
+                    </a:lnB>
+                  </a:tcPr>
+                </a:tc>
+                <a:tc>
+                  <a:txBody>
+                    <a:bodyPr/>
+                    <a:lstStyle/>
+                    <a:p>
+                      <a:pPr indent="0" marL="0">
+                        <a:buNone/>
+                      </a:pPr>
+                      <a:r>
+                        <a:rPr lang="en-US" sz="900" dirty="0">
+                          <a:solidFill>
+                            <a:srgbClr val="14181F"/>
+                          </a:solidFill>
+                        </a:rPr>
+                        <a:t>0%</a:t>
+                      </a:r>
+                      <a:endParaRPr lang="en-US" sz="900" dirty="0"/>
+                    </a:p>
+                  </a:txBody>
+                  <a:tcPr marL="50800" marR="50800" marT="50800" marB="50800">
+                    <a:lnL w="6350" cap="flat" cmpd="sng" algn="ctr">
+                      <a:solidFill>
+                        <a:srgbClr val="E2E7EE"/>
+                      </a:solidFill>
+                      <a:prstDash val="solid"/>
+                      <a:round/>
+                      <a:headEnd type="none" w="med" len="med"/>
+                      <a:tailEnd type="none" w="med" len="med"/>
+                    </a:lnL>
+                    <a:lnR w="6350" cap="flat" cmpd="sng" algn="ctr">
+                      <a:solidFill>
+                        <a:srgbClr val="E2E7EE"/>
+                      </a:solidFill>
+                      <a:prstDash val="solid"/>
+                      <a:round/>
+                      <a:headEnd type="none" w="med" len="med"/>
+                      <a:tailEnd type="none" w="med" len="med"/>
+                    </a:lnR>
+                    <a:lnT w="6350" cap="flat" cmpd="sng" algn="ctr">
+                      <a:solidFill>
+                        <a:srgbClr val="E2E7EE"/>
+                      </a:solidFill>
+                      <a:prstDash val="solid"/>
+                      <a:round/>
+                      <a:headEnd type="none" w="med" len="med"/>
+                      <a:tailEnd type="none" w="med" len="med"/>
+                    </a:lnT>
+                    <a:lnB w="6350" cap="flat" cmpd="sng" algn="ctr">
+                      <a:solidFill>
+                        <a:srgbClr val="E2E7EE"/>
+                      </a:solidFill>
+                      <a:prstDash val="solid"/>
+                      <a:round/>
+                      <a:headEnd type="none" w="med" len="med"/>
+                      <a:tailEnd type="none" w="med" len="med"/>
+                    </a:lnB>
+                  </a:tcPr>
+                </a:tc>
+                <a:tc>
+                  <a:txBody>
+                    <a:bodyPr/>
+                    <a:lstStyle/>
+                    <a:p>
+                      <a:pPr indent="0" marL="0">
+                        <a:buNone/>
+                      </a:pPr>
+                      <a:r>
+                        <a:rPr lang="en-US" sz="900" dirty="0">
+                          <a:solidFill>
+                            <a:srgbClr val="14181F"/>
+                          </a:solidFill>
+                        </a:rPr>
+                        <a:t>Delayed</a:t>
                       </a:r>
                       <a:endParaRPr lang="en-US" sz="900" dirty="0"/>
                     </a:p>
@@ -4499,123 +4619,181 @@
                             <a:srgbClr val="14181F"/>
                           </a:solidFill>
                         </a:rPr>
-                        <a:t>2025-07</a:t>
-                      </a:r>
-                      <a:endParaRPr lang="en-US" sz="900" dirty="0"/>
-                    </a:p>
-                  </a:txBody>
-                  <a:tcPr marL="50800" marR="50800" marT="50800" marB="50800">
-                    <a:lnL w="6350" cap="flat" cmpd="sng" algn="ctr">
-                      <a:solidFill>
-                        <a:srgbClr val="E2E7EE"/>
-                      </a:solidFill>
-                      <a:prstDash val="solid"/>
-                      <a:round/>
-                      <a:headEnd type="none" w="med" len="med"/>
-                      <a:tailEnd type="none" w="med" len="med"/>
-                    </a:lnL>
-                    <a:lnR w="6350" cap="flat" cmpd="sng" algn="ctr">
-                      <a:solidFill>
-                        <a:srgbClr val="E2E7EE"/>
-                      </a:solidFill>
-                      <a:prstDash val="solid"/>
-                      <a:round/>
-                      <a:headEnd type="none" w="med" len="med"/>
-                      <a:tailEnd type="none" w="med" len="med"/>
-                    </a:lnR>
-                    <a:lnT w="6350" cap="flat" cmpd="sng" algn="ctr">
-                      <a:solidFill>
-                        <a:srgbClr val="E2E7EE"/>
-                      </a:solidFill>
-                      <a:prstDash val="solid"/>
-                      <a:round/>
-                      <a:headEnd type="none" w="med" len="med"/>
-                      <a:tailEnd type="none" w="med" len="med"/>
-                    </a:lnT>
-                    <a:lnB w="6350" cap="flat" cmpd="sng" algn="ctr">
-                      <a:solidFill>
-                        <a:srgbClr val="E2E7EE"/>
-                      </a:solidFill>
-                      <a:prstDash val="solid"/>
-                      <a:round/>
-                      <a:headEnd type="none" w="med" len="med"/>
-                      <a:tailEnd type="none" w="med" len="med"/>
-                    </a:lnB>
-                  </a:tcPr>
-                </a:tc>
-                <a:tc>
-                  <a:txBody>
-                    <a:bodyPr/>
-                    <a:lstStyle/>
-                    <a:p>
-                      <a:pPr indent="0" marL="0">
-                        <a:buNone/>
-                      </a:pPr>
-                      <a:r>
-                        <a:rPr lang="en-US" sz="900" dirty="0">
-                          <a:solidFill>
-                            <a:srgbClr val="14181F"/>
-                          </a:solidFill>
-                        </a:rPr>
-                        <a:t>INR 0</a:t>
-                      </a:r>
-                      <a:endParaRPr lang="en-US" sz="900" dirty="0"/>
-                    </a:p>
-                  </a:txBody>
-                  <a:tcPr marL="50800" marR="50800" marT="50800" marB="50800">
-                    <a:lnL w="6350" cap="flat" cmpd="sng" algn="ctr">
-                      <a:solidFill>
-                        <a:srgbClr val="E2E7EE"/>
-                      </a:solidFill>
-                      <a:prstDash val="solid"/>
-                      <a:round/>
-                      <a:headEnd type="none" w="med" len="med"/>
-                      <a:tailEnd type="none" w="med" len="med"/>
-                    </a:lnL>
-                    <a:lnR w="6350" cap="flat" cmpd="sng" algn="ctr">
-                      <a:solidFill>
-                        <a:srgbClr val="E2E7EE"/>
-                      </a:solidFill>
-                      <a:prstDash val="solid"/>
-                      <a:round/>
-                      <a:headEnd type="none" w="med" len="med"/>
-                      <a:tailEnd type="none" w="med" len="med"/>
-                    </a:lnR>
-                    <a:lnT w="6350" cap="flat" cmpd="sng" algn="ctr">
-                      <a:solidFill>
-                        <a:srgbClr val="E2E7EE"/>
-                      </a:solidFill>
-                      <a:prstDash val="solid"/>
-                      <a:round/>
-                      <a:headEnd type="none" w="med" len="med"/>
-                      <a:tailEnd type="none" w="med" len="med"/>
-                    </a:lnT>
-                    <a:lnB w="6350" cap="flat" cmpd="sng" algn="ctr">
-                      <a:solidFill>
-                        <a:srgbClr val="E2E7EE"/>
-                      </a:solidFill>
-                      <a:prstDash val="solid"/>
-                      <a:round/>
-                      <a:headEnd type="none" w="med" len="med"/>
-                      <a:tailEnd type="none" w="med" len="med"/>
-                    </a:lnB>
-                  </a:tcPr>
-                </a:tc>
-                <a:tc>
-                  <a:txBody>
-                    <a:bodyPr/>
-                    <a:lstStyle/>
-                    <a:p>
-                      <a:pPr indent="0" marL="0">
-                        <a:buNone/>
-                      </a:pPr>
-                      <a:r>
-                        <a:rPr lang="en-US" sz="900" dirty="0">
-                          <a:solidFill>
-                            <a:srgbClr val="14181F"/>
-                          </a:solidFill>
-                        </a:rPr>
-                        <a:t>INR 0</a:t>
+                        <a:t>RA2</a:t>
+                      </a:r>
+                      <a:endParaRPr lang="en-US" sz="900" dirty="0"/>
+                    </a:p>
+                  </a:txBody>
+                  <a:tcPr marL="50800" marR="50800" marT="50800" marB="50800">
+                    <a:lnL w="6350" cap="flat" cmpd="sng" algn="ctr">
+                      <a:solidFill>
+                        <a:srgbClr val="E2E7EE"/>
+                      </a:solidFill>
+                      <a:prstDash val="solid"/>
+                      <a:round/>
+                      <a:headEnd type="none" w="med" len="med"/>
+                      <a:tailEnd type="none" w="med" len="med"/>
+                    </a:lnL>
+                    <a:lnR w="6350" cap="flat" cmpd="sng" algn="ctr">
+                      <a:solidFill>
+                        <a:srgbClr val="E2E7EE"/>
+                      </a:solidFill>
+                      <a:prstDash val="solid"/>
+                      <a:round/>
+                      <a:headEnd type="none" w="med" len="med"/>
+                      <a:tailEnd type="none" w="med" len="med"/>
+                    </a:lnR>
+                    <a:lnT w="6350" cap="flat" cmpd="sng" algn="ctr">
+                      <a:solidFill>
+                        <a:srgbClr val="E2E7EE"/>
+                      </a:solidFill>
+                      <a:prstDash val="solid"/>
+                      <a:round/>
+                      <a:headEnd type="none" w="med" len="med"/>
+                      <a:tailEnd type="none" w="med" len="med"/>
+                    </a:lnT>
+                    <a:lnB w="6350" cap="flat" cmpd="sng" algn="ctr">
+                      <a:solidFill>
+                        <a:srgbClr val="E2E7EE"/>
+                      </a:solidFill>
+                      <a:prstDash val="solid"/>
+                      <a:round/>
+                      <a:headEnd type="none" w="med" len="med"/>
+                      <a:tailEnd type="none" w="med" len="med"/>
+                    </a:lnB>
+                  </a:tcPr>
+                </a:tc>
+                <a:tc>
+                  <a:txBody>
+                    <a:bodyPr/>
+                    <a:lstStyle/>
+                    <a:p>
+                      <a:pPr indent="0" marL="0">
+                        <a:buNone/>
+                      </a:pPr>
+                      <a:r>
+                        <a:rPr lang="en-US" sz="900" dirty="0">
+                          <a:solidFill>
+                            <a:srgbClr val="14181F"/>
+                          </a:solidFill>
+                        </a:rPr>
+                        <a:t>2025-08-22</a:t>
+                      </a:r>
+                      <a:endParaRPr lang="en-US" sz="900" dirty="0"/>
+                    </a:p>
+                  </a:txBody>
+                  <a:tcPr marL="50800" marR="50800" marT="50800" marB="50800">
+                    <a:lnL w="6350" cap="flat" cmpd="sng" algn="ctr">
+                      <a:solidFill>
+                        <a:srgbClr val="E2E7EE"/>
+                      </a:solidFill>
+                      <a:prstDash val="solid"/>
+                      <a:round/>
+                      <a:headEnd type="none" w="med" len="med"/>
+                      <a:tailEnd type="none" w="med" len="med"/>
+                    </a:lnL>
+                    <a:lnR w="6350" cap="flat" cmpd="sng" algn="ctr">
+                      <a:solidFill>
+                        <a:srgbClr val="E2E7EE"/>
+                      </a:solidFill>
+                      <a:prstDash val="solid"/>
+                      <a:round/>
+                      <a:headEnd type="none" w="med" len="med"/>
+                      <a:tailEnd type="none" w="med" len="med"/>
+                    </a:lnR>
+                    <a:lnT w="6350" cap="flat" cmpd="sng" algn="ctr">
+                      <a:solidFill>
+                        <a:srgbClr val="E2E7EE"/>
+                      </a:solidFill>
+                      <a:prstDash val="solid"/>
+                      <a:round/>
+                      <a:headEnd type="none" w="med" len="med"/>
+                      <a:tailEnd type="none" w="med" len="med"/>
+                    </a:lnT>
+                    <a:lnB w="6350" cap="flat" cmpd="sng" algn="ctr">
+                      <a:solidFill>
+                        <a:srgbClr val="E2E7EE"/>
+                      </a:solidFill>
+                      <a:prstDash val="solid"/>
+                      <a:round/>
+                      <a:headEnd type="none" w="med" len="med"/>
+                      <a:tailEnd type="none" w="med" len="med"/>
+                    </a:lnB>
+                  </a:tcPr>
+                </a:tc>
+                <a:tc>
+                  <a:txBody>
+                    <a:bodyPr/>
+                    <a:lstStyle/>
+                    <a:p>
+                      <a:pPr indent="0" marL="0">
+                        <a:buNone/>
+                      </a:pPr>
+                      <a:r>
+                        <a:rPr lang="en-US" sz="900" dirty="0">
+                          <a:solidFill>
+                            <a:srgbClr val="14181F"/>
+                          </a:solidFill>
+                        </a:rPr>
+                        <a:t>15%</a:t>
+                      </a:r>
+                      <a:endParaRPr lang="en-US" sz="900" dirty="0"/>
+                    </a:p>
+                  </a:txBody>
+                  <a:tcPr marL="50800" marR="50800" marT="50800" marB="50800">
+                    <a:lnL w="6350" cap="flat" cmpd="sng" algn="ctr">
+                      <a:solidFill>
+                        <a:srgbClr val="E2E7EE"/>
+                      </a:solidFill>
+                      <a:prstDash val="solid"/>
+                      <a:round/>
+                      <a:headEnd type="none" w="med" len="med"/>
+                      <a:tailEnd type="none" w="med" len="med"/>
+                    </a:lnL>
+                    <a:lnR w="6350" cap="flat" cmpd="sng" algn="ctr">
+                      <a:solidFill>
+                        <a:srgbClr val="E2E7EE"/>
+                      </a:solidFill>
+                      <a:prstDash val="solid"/>
+                      <a:round/>
+                      <a:headEnd type="none" w="med" len="med"/>
+                      <a:tailEnd type="none" w="med" len="med"/>
+                    </a:lnR>
+                    <a:lnT w="6350" cap="flat" cmpd="sng" algn="ctr">
+                      <a:solidFill>
+                        <a:srgbClr val="E2E7EE"/>
+                      </a:solidFill>
+                      <a:prstDash val="solid"/>
+                      <a:round/>
+                      <a:headEnd type="none" w="med" len="med"/>
+                      <a:tailEnd type="none" w="med" len="med"/>
+                    </a:lnT>
+                    <a:lnB w="6350" cap="flat" cmpd="sng" algn="ctr">
+                      <a:solidFill>
+                        <a:srgbClr val="E2E7EE"/>
+                      </a:solidFill>
+                      <a:prstDash val="solid"/>
+                      <a:round/>
+                      <a:headEnd type="none" w="med" len="med"/>
+                      <a:tailEnd type="none" w="med" len="med"/>
+                    </a:lnB>
+                  </a:tcPr>
+                </a:tc>
+                <a:tc>
+                  <a:txBody>
+                    <a:bodyPr/>
+                    <a:lstStyle/>
+                    <a:p>
+                      <a:pPr indent="0" marL="0">
+                        <a:buNone/>
+                      </a:pPr>
+                      <a:r>
+                        <a:rPr lang="en-US" sz="900" dirty="0">
+                          <a:solidFill>
+                            <a:srgbClr val="14181F"/>
+                          </a:solidFill>
+                        </a:rPr>
+                        <a:t>Delayed</a:t>
                       </a:r>
                       <a:endParaRPr lang="en-US" sz="900" dirty="0"/>
                     </a:p>
@@ -4675,123 +4853,181 @@
                             <a:srgbClr val="14181F"/>
                           </a:solidFill>
                         </a:rPr>
-                        <a:t>2025-08</a:t>
-                      </a:r>
-                      <a:endParaRPr lang="en-US" sz="900" dirty="0"/>
-                    </a:p>
-                  </a:txBody>
-                  <a:tcPr marL="50800" marR="50800" marT="50800" marB="50800">
-                    <a:lnL w="6350" cap="flat" cmpd="sng" algn="ctr">
-                      <a:solidFill>
-                        <a:srgbClr val="E2E7EE"/>
-                      </a:solidFill>
-                      <a:prstDash val="solid"/>
-                      <a:round/>
-                      <a:headEnd type="none" w="med" len="med"/>
-                      <a:tailEnd type="none" w="med" len="med"/>
-                    </a:lnL>
-                    <a:lnR w="6350" cap="flat" cmpd="sng" algn="ctr">
-                      <a:solidFill>
-                        <a:srgbClr val="E2E7EE"/>
-                      </a:solidFill>
-                      <a:prstDash val="solid"/>
-                      <a:round/>
-                      <a:headEnd type="none" w="med" len="med"/>
-                      <a:tailEnd type="none" w="med" len="med"/>
-                    </a:lnR>
-                    <a:lnT w="6350" cap="flat" cmpd="sng" algn="ctr">
-                      <a:solidFill>
-                        <a:srgbClr val="E2E7EE"/>
-                      </a:solidFill>
-                      <a:prstDash val="solid"/>
-                      <a:round/>
-                      <a:headEnd type="none" w="med" len="med"/>
-                      <a:tailEnd type="none" w="med" len="med"/>
-                    </a:lnT>
-                    <a:lnB w="6350" cap="flat" cmpd="sng" algn="ctr">
-                      <a:solidFill>
-                        <a:srgbClr val="E2E7EE"/>
-                      </a:solidFill>
-                      <a:prstDash val="solid"/>
-                      <a:round/>
-                      <a:headEnd type="none" w="med" len="med"/>
-                      <a:tailEnd type="none" w="med" len="med"/>
-                    </a:lnB>
-                  </a:tcPr>
-                </a:tc>
-                <a:tc>
-                  <a:txBody>
-                    <a:bodyPr/>
-                    <a:lstStyle/>
-                    <a:p>
-                      <a:pPr indent="0" marL="0">
-                        <a:buNone/>
-                      </a:pPr>
-                      <a:r>
-                        <a:rPr lang="en-US" sz="900" dirty="0">
-                          <a:solidFill>
-                            <a:srgbClr val="14181F"/>
-                          </a:solidFill>
-                        </a:rPr>
-                        <a:t>INR 3,59,25,000</a:t>
-                      </a:r>
-                      <a:endParaRPr lang="en-US" sz="900" dirty="0"/>
-                    </a:p>
-                  </a:txBody>
-                  <a:tcPr marL="50800" marR="50800" marT="50800" marB="50800">
-                    <a:lnL w="6350" cap="flat" cmpd="sng" algn="ctr">
-                      <a:solidFill>
-                        <a:srgbClr val="E2E7EE"/>
-                      </a:solidFill>
-                      <a:prstDash val="solid"/>
-                      <a:round/>
-                      <a:headEnd type="none" w="med" len="med"/>
-                      <a:tailEnd type="none" w="med" len="med"/>
-                    </a:lnL>
-                    <a:lnR w="6350" cap="flat" cmpd="sng" algn="ctr">
-                      <a:solidFill>
-                        <a:srgbClr val="E2E7EE"/>
-                      </a:solidFill>
-                      <a:prstDash val="solid"/>
-                      <a:round/>
-                      <a:headEnd type="none" w="med" len="med"/>
-                      <a:tailEnd type="none" w="med" len="med"/>
-                    </a:lnR>
-                    <a:lnT w="6350" cap="flat" cmpd="sng" algn="ctr">
-                      <a:solidFill>
-                        <a:srgbClr val="E2E7EE"/>
-                      </a:solidFill>
-                      <a:prstDash val="solid"/>
-                      <a:round/>
-                      <a:headEnd type="none" w="med" len="med"/>
-                      <a:tailEnd type="none" w="med" len="med"/>
-                    </a:lnT>
-                    <a:lnB w="6350" cap="flat" cmpd="sng" algn="ctr">
-                      <a:solidFill>
-                        <a:srgbClr val="E2E7EE"/>
-                      </a:solidFill>
-                      <a:prstDash val="solid"/>
-                      <a:round/>
-                      <a:headEnd type="none" w="med" len="med"/>
-                      <a:tailEnd type="none" w="med" len="med"/>
-                    </a:lnB>
-                  </a:tcPr>
-                </a:tc>
-                <a:tc>
-                  <a:txBody>
-                    <a:bodyPr/>
-                    <a:lstStyle/>
-                    <a:p>
-                      <a:pPr indent="0" marL="0">
-                        <a:buNone/>
-                      </a:pPr>
-                      <a:r>
-                        <a:rPr lang="en-US" sz="900" dirty="0">
-                          <a:solidFill>
-                            <a:srgbClr val="14181F"/>
-                          </a:solidFill>
-                        </a:rPr>
-                        <a:t>INR 3,59,25,000</a:t>
+                        <a:t>RA3</a:t>
+                      </a:r>
+                      <a:endParaRPr lang="en-US" sz="900" dirty="0"/>
+                    </a:p>
+                  </a:txBody>
+                  <a:tcPr marL="50800" marR="50800" marT="50800" marB="50800">
+                    <a:lnL w="6350" cap="flat" cmpd="sng" algn="ctr">
+                      <a:solidFill>
+                        <a:srgbClr val="E2E7EE"/>
+                      </a:solidFill>
+                      <a:prstDash val="solid"/>
+                      <a:round/>
+                      <a:headEnd type="none" w="med" len="med"/>
+                      <a:tailEnd type="none" w="med" len="med"/>
+                    </a:lnL>
+                    <a:lnR w="6350" cap="flat" cmpd="sng" algn="ctr">
+                      <a:solidFill>
+                        <a:srgbClr val="E2E7EE"/>
+                      </a:solidFill>
+                      <a:prstDash val="solid"/>
+                      <a:round/>
+                      <a:headEnd type="none" w="med" len="med"/>
+                      <a:tailEnd type="none" w="med" len="med"/>
+                    </a:lnR>
+                    <a:lnT w="6350" cap="flat" cmpd="sng" algn="ctr">
+                      <a:solidFill>
+                        <a:srgbClr val="E2E7EE"/>
+                      </a:solidFill>
+                      <a:prstDash val="solid"/>
+                      <a:round/>
+                      <a:headEnd type="none" w="med" len="med"/>
+                      <a:tailEnd type="none" w="med" len="med"/>
+                    </a:lnT>
+                    <a:lnB w="6350" cap="flat" cmpd="sng" algn="ctr">
+                      <a:solidFill>
+                        <a:srgbClr val="E2E7EE"/>
+                      </a:solidFill>
+                      <a:prstDash val="solid"/>
+                      <a:round/>
+                      <a:headEnd type="none" w="med" len="med"/>
+                      <a:tailEnd type="none" w="med" len="med"/>
+                    </a:lnB>
+                  </a:tcPr>
+                </a:tc>
+                <a:tc>
+                  <a:txBody>
+                    <a:bodyPr/>
+                    <a:lstStyle/>
+                    <a:p>
+                      <a:pPr indent="0" marL="0">
+                        <a:buNone/>
+                      </a:pPr>
+                      <a:r>
+                        <a:rPr lang="en-US" sz="900" dirty="0">
+                          <a:solidFill>
+                            <a:srgbClr val="14181F"/>
+                          </a:solidFill>
+                        </a:rPr>
+                        <a:t>2025-10-11</a:t>
+                      </a:r>
+                      <a:endParaRPr lang="en-US" sz="900" dirty="0"/>
+                    </a:p>
+                  </a:txBody>
+                  <a:tcPr marL="50800" marR="50800" marT="50800" marB="50800">
+                    <a:lnL w="6350" cap="flat" cmpd="sng" algn="ctr">
+                      <a:solidFill>
+                        <a:srgbClr val="E2E7EE"/>
+                      </a:solidFill>
+                      <a:prstDash val="solid"/>
+                      <a:round/>
+                      <a:headEnd type="none" w="med" len="med"/>
+                      <a:tailEnd type="none" w="med" len="med"/>
+                    </a:lnL>
+                    <a:lnR w="6350" cap="flat" cmpd="sng" algn="ctr">
+                      <a:solidFill>
+                        <a:srgbClr val="E2E7EE"/>
+                      </a:solidFill>
+                      <a:prstDash val="solid"/>
+                      <a:round/>
+                      <a:headEnd type="none" w="med" len="med"/>
+                      <a:tailEnd type="none" w="med" len="med"/>
+                    </a:lnR>
+                    <a:lnT w="6350" cap="flat" cmpd="sng" algn="ctr">
+                      <a:solidFill>
+                        <a:srgbClr val="E2E7EE"/>
+                      </a:solidFill>
+                      <a:prstDash val="solid"/>
+                      <a:round/>
+                      <a:headEnd type="none" w="med" len="med"/>
+                      <a:tailEnd type="none" w="med" len="med"/>
+                    </a:lnT>
+                    <a:lnB w="6350" cap="flat" cmpd="sng" algn="ctr">
+                      <a:solidFill>
+                        <a:srgbClr val="E2E7EE"/>
+                      </a:solidFill>
+                      <a:prstDash val="solid"/>
+                      <a:round/>
+                      <a:headEnd type="none" w="med" len="med"/>
+                      <a:tailEnd type="none" w="med" len="med"/>
+                    </a:lnB>
+                  </a:tcPr>
+                </a:tc>
+                <a:tc>
+                  <a:txBody>
+                    <a:bodyPr/>
+                    <a:lstStyle/>
+                    <a:p>
+                      <a:pPr indent="0" marL="0">
+                        <a:buNone/>
+                      </a:pPr>
+                      <a:r>
+                        <a:rPr lang="en-US" sz="900" dirty="0">
+                          <a:solidFill>
+                            <a:srgbClr val="14181F"/>
+                          </a:solidFill>
+                        </a:rPr>
+                        <a:t>20%</a:t>
+                      </a:r>
+                      <a:endParaRPr lang="en-US" sz="900" dirty="0"/>
+                    </a:p>
+                  </a:txBody>
+                  <a:tcPr marL="50800" marR="50800" marT="50800" marB="50800">
+                    <a:lnL w="6350" cap="flat" cmpd="sng" algn="ctr">
+                      <a:solidFill>
+                        <a:srgbClr val="E2E7EE"/>
+                      </a:solidFill>
+                      <a:prstDash val="solid"/>
+                      <a:round/>
+                      <a:headEnd type="none" w="med" len="med"/>
+                      <a:tailEnd type="none" w="med" len="med"/>
+                    </a:lnL>
+                    <a:lnR w="6350" cap="flat" cmpd="sng" algn="ctr">
+                      <a:solidFill>
+                        <a:srgbClr val="E2E7EE"/>
+                      </a:solidFill>
+                      <a:prstDash val="solid"/>
+                      <a:round/>
+                      <a:headEnd type="none" w="med" len="med"/>
+                      <a:tailEnd type="none" w="med" len="med"/>
+                    </a:lnR>
+                    <a:lnT w="6350" cap="flat" cmpd="sng" algn="ctr">
+                      <a:solidFill>
+                        <a:srgbClr val="E2E7EE"/>
+                      </a:solidFill>
+                      <a:prstDash val="solid"/>
+                      <a:round/>
+                      <a:headEnd type="none" w="med" len="med"/>
+                      <a:tailEnd type="none" w="med" len="med"/>
+                    </a:lnT>
+                    <a:lnB w="6350" cap="flat" cmpd="sng" algn="ctr">
+                      <a:solidFill>
+                        <a:srgbClr val="E2E7EE"/>
+                      </a:solidFill>
+                      <a:prstDash val="solid"/>
+                      <a:round/>
+                      <a:headEnd type="none" w="med" len="med"/>
+                      <a:tailEnd type="none" w="med" len="med"/>
+                    </a:lnB>
+                  </a:tcPr>
+                </a:tc>
+                <a:tc>
+                  <a:txBody>
+                    <a:bodyPr/>
+                    <a:lstStyle/>
+                    <a:p>
+                      <a:pPr indent="0" marL="0">
+                        <a:buNone/>
+                      </a:pPr>
+                      <a:r>
+                        <a:rPr lang="en-US" sz="900" dirty="0">
+                          <a:solidFill>
+                            <a:srgbClr val="14181F"/>
+                          </a:solidFill>
+                        </a:rPr>
+                        <a:t>Delayed</a:t>
                       </a:r>
                       <a:endParaRPr lang="en-US" sz="900" dirty="0"/>
                     </a:p>
@@ -4851,123 +5087,181 @@
                             <a:srgbClr val="14181F"/>
                           </a:solidFill>
                         </a:rPr>
-                        <a:t>2025-09</a:t>
-                      </a:r>
-                      <a:endParaRPr lang="en-US" sz="900" dirty="0"/>
-                    </a:p>
-                  </a:txBody>
-                  <a:tcPr marL="50800" marR="50800" marT="50800" marB="50800">
-                    <a:lnL w="6350" cap="flat" cmpd="sng" algn="ctr">
-                      <a:solidFill>
-                        <a:srgbClr val="E2E7EE"/>
-                      </a:solidFill>
-                      <a:prstDash val="solid"/>
-                      <a:round/>
-                      <a:headEnd type="none" w="med" len="med"/>
-                      <a:tailEnd type="none" w="med" len="med"/>
-                    </a:lnL>
-                    <a:lnR w="6350" cap="flat" cmpd="sng" algn="ctr">
-                      <a:solidFill>
-                        <a:srgbClr val="E2E7EE"/>
-                      </a:solidFill>
-                      <a:prstDash val="solid"/>
-                      <a:round/>
-                      <a:headEnd type="none" w="med" len="med"/>
-                      <a:tailEnd type="none" w="med" len="med"/>
-                    </a:lnR>
-                    <a:lnT w="6350" cap="flat" cmpd="sng" algn="ctr">
-                      <a:solidFill>
-                        <a:srgbClr val="E2E7EE"/>
-                      </a:solidFill>
-                      <a:prstDash val="solid"/>
-                      <a:round/>
-                      <a:headEnd type="none" w="med" len="med"/>
-                      <a:tailEnd type="none" w="med" len="med"/>
-                    </a:lnT>
-                    <a:lnB w="6350" cap="flat" cmpd="sng" algn="ctr">
-                      <a:solidFill>
-                        <a:srgbClr val="E2E7EE"/>
-                      </a:solidFill>
-                      <a:prstDash val="solid"/>
-                      <a:round/>
-                      <a:headEnd type="none" w="med" len="med"/>
-                      <a:tailEnd type="none" w="med" len="med"/>
-                    </a:lnB>
-                  </a:tcPr>
-                </a:tc>
-                <a:tc>
-                  <a:txBody>
-                    <a:bodyPr/>
-                    <a:lstStyle/>
-                    <a:p>
-                      <a:pPr indent="0" marL="0">
-                        <a:buNone/>
-                      </a:pPr>
-                      <a:r>
-                        <a:rPr lang="en-US" sz="900" dirty="0">
-                          <a:solidFill>
-                            <a:srgbClr val="14181F"/>
-                          </a:solidFill>
-                        </a:rPr>
-                        <a:t>INR 0</a:t>
-                      </a:r>
-                      <a:endParaRPr lang="en-US" sz="900" dirty="0"/>
-                    </a:p>
-                  </a:txBody>
-                  <a:tcPr marL="50800" marR="50800" marT="50800" marB="50800">
-                    <a:lnL w="6350" cap="flat" cmpd="sng" algn="ctr">
-                      <a:solidFill>
-                        <a:srgbClr val="E2E7EE"/>
-                      </a:solidFill>
-                      <a:prstDash val="solid"/>
-                      <a:round/>
-                      <a:headEnd type="none" w="med" len="med"/>
-                      <a:tailEnd type="none" w="med" len="med"/>
-                    </a:lnL>
-                    <a:lnR w="6350" cap="flat" cmpd="sng" algn="ctr">
-                      <a:solidFill>
-                        <a:srgbClr val="E2E7EE"/>
-                      </a:solidFill>
-                      <a:prstDash val="solid"/>
-                      <a:round/>
-                      <a:headEnd type="none" w="med" len="med"/>
-                      <a:tailEnd type="none" w="med" len="med"/>
-                    </a:lnR>
-                    <a:lnT w="6350" cap="flat" cmpd="sng" algn="ctr">
-                      <a:solidFill>
-                        <a:srgbClr val="E2E7EE"/>
-                      </a:solidFill>
-                      <a:prstDash val="solid"/>
-                      <a:round/>
-                      <a:headEnd type="none" w="med" len="med"/>
-                      <a:tailEnd type="none" w="med" len="med"/>
-                    </a:lnT>
-                    <a:lnB w="6350" cap="flat" cmpd="sng" algn="ctr">
-                      <a:solidFill>
-                        <a:srgbClr val="E2E7EE"/>
-                      </a:solidFill>
-                      <a:prstDash val="solid"/>
-                      <a:round/>
-                      <a:headEnd type="none" w="med" len="med"/>
-                      <a:tailEnd type="none" w="med" len="med"/>
-                    </a:lnB>
-                  </a:tcPr>
-                </a:tc>
-                <a:tc>
-                  <a:txBody>
-                    <a:bodyPr/>
-                    <a:lstStyle/>
-                    <a:p>
-                      <a:pPr indent="0" marL="0">
-                        <a:buNone/>
-                      </a:pPr>
-                      <a:r>
-                        <a:rPr lang="en-US" sz="900" dirty="0">
-                          <a:solidFill>
-                            <a:srgbClr val="14181F"/>
-                          </a:solidFill>
-                        </a:rPr>
-                        <a:t>INR 3,59,25,000</a:t>
+                        <a:t>RA4</a:t>
+                      </a:r>
+                      <a:endParaRPr lang="en-US" sz="900" dirty="0"/>
+                    </a:p>
+                  </a:txBody>
+                  <a:tcPr marL="50800" marR="50800" marT="50800" marB="50800">
+                    <a:lnL w="6350" cap="flat" cmpd="sng" algn="ctr">
+                      <a:solidFill>
+                        <a:srgbClr val="E2E7EE"/>
+                      </a:solidFill>
+                      <a:prstDash val="solid"/>
+                      <a:round/>
+                      <a:headEnd type="none" w="med" len="med"/>
+                      <a:tailEnd type="none" w="med" len="med"/>
+                    </a:lnL>
+                    <a:lnR w="6350" cap="flat" cmpd="sng" algn="ctr">
+                      <a:solidFill>
+                        <a:srgbClr val="E2E7EE"/>
+                      </a:solidFill>
+                      <a:prstDash val="solid"/>
+                      <a:round/>
+                      <a:headEnd type="none" w="med" len="med"/>
+                      <a:tailEnd type="none" w="med" len="med"/>
+                    </a:lnR>
+                    <a:lnT w="6350" cap="flat" cmpd="sng" algn="ctr">
+                      <a:solidFill>
+                        <a:srgbClr val="E2E7EE"/>
+                      </a:solidFill>
+                      <a:prstDash val="solid"/>
+                      <a:round/>
+                      <a:headEnd type="none" w="med" len="med"/>
+                      <a:tailEnd type="none" w="med" len="med"/>
+                    </a:lnT>
+                    <a:lnB w="6350" cap="flat" cmpd="sng" algn="ctr">
+                      <a:solidFill>
+                        <a:srgbClr val="E2E7EE"/>
+                      </a:solidFill>
+                      <a:prstDash val="solid"/>
+                      <a:round/>
+                      <a:headEnd type="none" w="med" len="med"/>
+                      <a:tailEnd type="none" w="med" len="med"/>
+                    </a:lnB>
+                  </a:tcPr>
+                </a:tc>
+                <a:tc>
+                  <a:txBody>
+                    <a:bodyPr/>
+                    <a:lstStyle/>
+                    <a:p>
+                      <a:pPr indent="0" marL="0">
+                        <a:buNone/>
+                      </a:pPr>
+                      <a:r>
+                        <a:rPr lang="en-US" sz="900" dirty="0">
+                          <a:solidFill>
+                            <a:srgbClr val="14181F"/>
+                          </a:solidFill>
+                        </a:rPr>
+                        <a:t>2025-11-30</a:t>
+                      </a:r>
+                      <a:endParaRPr lang="en-US" sz="900" dirty="0"/>
+                    </a:p>
+                  </a:txBody>
+                  <a:tcPr marL="50800" marR="50800" marT="50800" marB="50800">
+                    <a:lnL w="6350" cap="flat" cmpd="sng" algn="ctr">
+                      <a:solidFill>
+                        <a:srgbClr val="E2E7EE"/>
+                      </a:solidFill>
+                      <a:prstDash val="solid"/>
+                      <a:round/>
+                      <a:headEnd type="none" w="med" len="med"/>
+                      <a:tailEnd type="none" w="med" len="med"/>
+                    </a:lnL>
+                    <a:lnR w="6350" cap="flat" cmpd="sng" algn="ctr">
+                      <a:solidFill>
+                        <a:srgbClr val="E2E7EE"/>
+                      </a:solidFill>
+                      <a:prstDash val="solid"/>
+                      <a:round/>
+                      <a:headEnd type="none" w="med" len="med"/>
+                      <a:tailEnd type="none" w="med" len="med"/>
+                    </a:lnR>
+                    <a:lnT w="6350" cap="flat" cmpd="sng" algn="ctr">
+                      <a:solidFill>
+                        <a:srgbClr val="E2E7EE"/>
+                      </a:solidFill>
+                      <a:prstDash val="solid"/>
+                      <a:round/>
+                      <a:headEnd type="none" w="med" len="med"/>
+                      <a:tailEnd type="none" w="med" len="med"/>
+                    </a:lnT>
+                    <a:lnB w="6350" cap="flat" cmpd="sng" algn="ctr">
+                      <a:solidFill>
+                        <a:srgbClr val="E2E7EE"/>
+                      </a:solidFill>
+                      <a:prstDash val="solid"/>
+                      <a:round/>
+                      <a:headEnd type="none" w="med" len="med"/>
+                      <a:tailEnd type="none" w="med" len="med"/>
+                    </a:lnB>
+                  </a:tcPr>
+                </a:tc>
+                <a:tc>
+                  <a:txBody>
+                    <a:bodyPr/>
+                    <a:lstStyle/>
+                    <a:p>
+                      <a:pPr indent="0" marL="0">
+                        <a:buNone/>
+                      </a:pPr>
+                      <a:r>
+                        <a:rPr lang="en-US" sz="900" dirty="0">
+                          <a:solidFill>
+                            <a:srgbClr val="14181F"/>
+                          </a:solidFill>
+                        </a:rPr>
+                        <a:t>25%</a:t>
+                      </a:r>
+                      <a:endParaRPr lang="en-US" sz="900" dirty="0"/>
+                    </a:p>
+                  </a:txBody>
+                  <a:tcPr marL="50800" marR="50800" marT="50800" marB="50800">
+                    <a:lnL w="6350" cap="flat" cmpd="sng" algn="ctr">
+                      <a:solidFill>
+                        <a:srgbClr val="E2E7EE"/>
+                      </a:solidFill>
+                      <a:prstDash val="solid"/>
+                      <a:round/>
+                      <a:headEnd type="none" w="med" len="med"/>
+                      <a:tailEnd type="none" w="med" len="med"/>
+                    </a:lnL>
+                    <a:lnR w="6350" cap="flat" cmpd="sng" algn="ctr">
+                      <a:solidFill>
+                        <a:srgbClr val="E2E7EE"/>
+                      </a:solidFill>
+                      <a:prstDash val="solid"/>
+                      <a:round/>
+                      <a:headEnd type="none" w="med" len="med"/>
+                      <a:tailEnd type="none" w="med" len="med"/>
+                    </a:lnR>
+                    <a:lnT w="6350" cap="flat" cmpd="sng" algn="ctr">
+                      <a:solidFill>
+                        <a:srgbClr val="E2E7EE"/>
+                      </a:solidFill>
+                      <a:prstDash val="solid"/>
+                      <a:round/>
+                      <a:headEnd type="none" w="med" len="med"/>
+                      <a:tailEnd type="none" w="med" len="med"/>
+                    </a:lnT>
+                    <a:lnB w="6350" cap="flat" cmpd="sng" algn="ctr">
+                      <a:solidFill>
+                        <a:srgbClr val="E2E7EE"/>
+                      </a:solidFill>
+                      <a:prstDash val="solid"/>
+                      <a:round/>
+                      <a:headEnd type="none" w="med" len="med"/>
+                      <a:tailEnd type="none" w="med" len="med"/>
+                    </a:lnB>
+                  </a:tcPr>
+                </a:tc>
+                <a:tc>
+                  <a:txBody>
+                    <a:bodyPr/>
+                    <a:lstStyle/>
+                    <a:p>
+                      <a:pPr indent="0" marL="0">
+                        <a:buNone/>
+                      </a:pPr>
+                      <a:r>
+                        <a:rPr lang="en-US" sz="900" dirty="0">
+                          <a:solidFill>
+                            <a:srgbClr val="14181F"/>
+                          </a:solidFill>
+                        </a:rPr>
+                        <a:t>Delayed</a:t>
                       </a:r>
                       <a:endParaRPr lang="en-US" sz="900" dirty="0"/>
                     </a:p>
@@ -5027,123 +5321,181 @@
                             <a:srgbClr val="14181F"/>
                           </a:solidFill>
                         </a:rPr>
-                        <a:t>2025-10</a:t>
-                      </a:r>
-                      <a:endParaRPr lang="en-US" sz="900" dirty="0"/>
-                    </a:p>
-                  </a:txBody>
-                  <a:tcPr marL="50800" marR="50800" marT="50800" marB="50800">
-                    <a:lnL w="6350" cap="flat" cmpd="sng" algn="ctr">
-                      <a:solidFill>
-                        <a:srgbClr val="E2E7EE"/>
-                      </a:solidFill>
-                      <a:prstDash val="solid"/>
-                      <a:round/>
-                      <a:headEnd type="none" w="med" len="med"/>
-                      <a:tailEnd type="none" w="med" len="med"/>
-                    </a:lnL>
-                    <a:lnR w="6350" cap="flat" cmpd="sng" algn="ctr">
-                      <a:solidFill>
-                        <a:srgbClr val="E2E7EE"/>
-                      </a:solidFill>
-                      <a:prstDash val="solid"/>
-                      <a:round/>
-                      <a:headEnd type="none" w="med" len="med"/>
-                      <a:tailEnd type="none" w="med" len="med"/>
-                    </a:lnR>
-                    <a:lnT w="6350" cap="flat" cmpd="sng" algn="ctr">
-                      <a:solidFill>
-                        <a:srgbClr val="E2E7EE"/>
-                      </a:solidFill>
-                      <a:prstDash val="solid"/>
-                      <a:round/>
-                      <a:headEnd type="none" w="med" len="med"/>
-                      <a:tailEnd type="none" w="med" len="med"/>
-                    </a:lnT>
-                    <a:lnB w="6350" cap="flat" cmpd="sng" algn="ctr">
-                      <a:solidFill>
-                        <a:srgbClr val="E2E7EE"/>
-                      </a:solidFill>
-                      <a:prstDash val="solid"/>
-                      <a:round/>
-                      <a:headEnd type="none" w="med" len="med"/>
-                      <a:tailEnd type="none" w="med" len="med"/>
-                    </a:lnB>
-                  </a:tcPr>
-                </a:tc>
-                <a:tc>
-                  <a:txBody>
-                    <a:bodyPr/>
-                    <a:lstStyle/>
-                    <a:p>
-                      <a:pPr indent="0" marL="0">
-                        <a:buNone/>
-                      </a:pPr>
-                      <a:r>
-                        <a:rPr lang="en-US" sz="900" dirty="0">
-                          <a:solidFill>
-                            <a:srgbClr val="14181F"/>
-                          </a:solidFill>
-                        </a:rPr>
-                        <a:t>INR 4,79,00,000</a:t>
-                      </a:r>
-                      <a:endParaRPr lang="en-US" sz="900" dirty="0"/>
-                    </a:p>
-                  </a:txBody>
-                  <a:tcPr marL="50800" marR="50800" marT="50800" marB="50800">
-                    <a:lnL w="6350" cap="flat" cmpd="sng" algn="ctr">
-                      <a:solidFill>
-                        <a:srgbClr val="E2E7EE"/>
-                      </a:solidFill>
-                      <a:prstDash val="solid"/>
-                      <a:round/>
-                      <a:headEnd type="none" w="med" len="med"/>
-                      <a:tailEnd type="none" w="med" len="med"/>
-                    </a:lnL>
-                    <a:lnR w="6350" cap="flat" cmpd="sng" algn="ctr">
-                      <a:solidFill>
-                        <a:srgbClr val="E2E7EE"/>
-                      </a:solidFill>
-                      <a:prstDash val="solid"/>
-                      <a:round/>
-                      <a:headEnd type="none" w="med" len="med"/>
-                      <a:tailEnd type="none" w="med" len="med"/>
-                    </a:lnR>
-                    <a:lnT w="6350" cap="flat" cmpd="sng" algn="ctr">
-                      <a:solidFill>
-                        <a:srgbClr val="E2E7EE"/>
-                      </a:solidFill>
-                      <a:prstDash val="solid"/>
-                      <a:round/>
-                      <a:headEnd type="none" w="med" len="med"/>
-                      <a:tailEnd type="none" w="med" len="med"/>
-                    </a:lnT>
-                    <a:lnB w="6350" cap="flat" cmpd="sng" algn="ctr">
-                      <a:solidFill>
-                        <a:srgbClr val="E2E7EE"/>
-                      </a:solidFill>
-                      <a:prstDash val="solid"/>
-                      <a:round/>
-                      <a:headEnd type="none" w="med" len="med"/>
-                      <a:tailEnd type="none" w="med" len="med"/>
-                    </a:lnB>
-                  </a:tcPr>
-                </a:tc>
-                <a:tc>
-                  <a:txBody>
-                    <a:bodyPr/>
-                    <a:lstStyle/>
-                    <a:p>
-                      <a:pPr indent="0" marL="0">
-                        <a:buNone/>
-                      </a:pPr>
-                      <a:r>
-                        <a:rPr lang="en-US" sz="900" dirty="0">
-                          <a:solidFill>
-                            <a:srgbClr val="14181F"/>
-                          </a:solidFill>
-                        </a:rPr>
-                        <a:t>INR 8,38,25,000</a:t>
+                        <a:t>RA5</a:t>
+                      </a:r>
+                      <a:endParaRPr lang="en-US" sz="900" dirty="0"/>
+                    </a:p>
+                  </a:txBody>
+                  <a:tcPr marL="50800" marR="50800" marT="50800" marB="50800">
+                    <a:lnL w="6350" cap="flat" cmpd="sng" algn="ctr">
+                      <a:solidFill>
+                        <a:srgbClr val="E2E7EE"/>
+                      </a:solidFill>
+                      <a:prstDash val="solid"/>
+                      <a:round/>
+                      <a:headEnd type="none" w="med" len="med"/>
+                      <a:tailEnd type="none" w="med" len="med"/>
+                    </a:lnL>
+                    <a:lnR w="6350" cap="flat" cmpd="sng" algn="ctr">
+                      <a:solidFill>
+                        <a:srgbClr val="E2E7EE"/>
+                      </a:solidFill>
+                      <a:prstDash val="solid"/>
+                      <a:round/>
+                      <a:headEnd type="none" w="med" len="med"/>
+                      <a:tailEnd type="none" w="med" len="med"/>
+                    </a:lnR>
+                    <a:lnT w="6350" cap="flat" cmpd="sng" algn="ctr">
+                      <a:solidFill>
+                        <a:srgbClr val="E2E7EE"/>
+                      </a:solidFill>
+                      <a:prstDash val="solid"/>
+                      <a:round/>
+                      <a:headEnd type="none" w="med" len="med"/>
+                      <a:tailEnd type="none" w="med" len="med"/>
+                    </a:lnT>
+                    <a:lnB w="6350" cap="flat" cmpd="sng" algn="ctr">
+                      <a:solidFill>
+                        <a:srgbClr val="E2E7EE"/>
+                      </a:solidFill>
+                      <a:prstDash val="solid"/>
+                      <a:round/>
+                      <a:headEnd type="none" w="med" len="med"/>
+                      <a:tailEnd type="none" w="med" len="med"/>
+                    </a:lnB>
+                  </a:tcPr>
+                </a:tc>
+                <a:tc>
+                  <a:txBody>
+                    <a:bodyPr/>
+                    <a:lstStyle/>
+                    <a:p>
+                      <a:pPr indent="0" marL="0">
+                        <a:buNone/>
+                      </a:pPr>
+                      <a:r>
+                        <a:rPr lang="en-US" sz="900" dirty="0">
+                          <a:solidFill>
+                            <a:srgbClr val="14181F"/>
+                          </a:solidFill>
+                        </a:rPr>
+                        <a:t>2026-01-14</a:t>
+                      </a:r>
+                      <a:endParaRPr lang="en-US" sz="900" dirty="0"/>
+                    </a:p>
+                  </a:txBody>
+                  <a:tcPr marL="50800" marR="50800" marT="50800" marB="50800">
+                    <a:lnL w="6350" cap="flat" cmpd="sng" algn="ctr">
+                      <a:solidFill>
+                        <a:srgbClr val="E2E7EE"/>
+                      </a:solidFill>
+                      <a:prstDash val="solid"/>
+                      <a:round/>
+                      <a:headEnd type="none" w="med" len="med"/>
+                      <a:tailEnd type="none" w="med" len="med"/>
+                    </a:lnL>
+                    <a:lnR w="6350" cap="flat" cmpd="sng" algn="ctr">
+                      <a:solidFill>
+                        <a:srgbClr val="E2E7EE"/>
+                      </a:solidFill>
+                      <a:prstDash val="solid"/>
+                      <a:round/>
+                      <a:headEnd type="none" w="med" len="med"/>
+                      <a:tailEnd type="none" w="med" len="med"/>
+                    </a:lnR>
+                    <a:lnT w="6350" cap="flat" cmpd="sng" algn="ctr">
+                      <a:solidFill>
+                        <a:srgbClr val="E2E7EE"/>
+                      </a:solidFill>
+                      <a:prstDash val="solid"/>
+                      <a:round/>
+                      <a:headEnd type="none" w="med" len="med"/>
+                      <a:tailEnd type="none" w="med" len="med"/>
+                    </a:lnT>
+                    <a:lnB w="6350" cap="flat" cmpd="sng" algn="ctr">
+                      <a:solidFill>
+                        <a:srgbClr val="E2E7EE"/>
+                      </a:solidFill>
+                      <a:prstDash val="solid"/>
+                      <a:round/>
+                      <a:headEnd type="none" w="med" len="med"/>
+                      <a:tailEnd type="none" w="med" len="med"/>
+                    </a:lnB>
+                  </a:tcPr>
+                </a:tc>
+                <a:tc>
+                  <a:txBody>
+                    <a:bodyPr/>
+                    <a:lstStyle/>
+                    <a:p>
+                      <a:pPr indent="0" marL="0">
+                        <a:buNone/>
+                      </a:pPr>
+                      <a:r>
+                        <a:rPr lang="en-US" sz="900" dirty="0">
+                          <a:solidFill>
+                            <a:srgbClr val="14181F"/>
+                          </a:solidFill>
+                        </a:rPr>
+                        <a:t>25%</a:t>
+                      </a:r>
+                      <a:endParaRPr lang="en-US" sz="900" dirty="0"/>
+                    </a:p>
+                  </a:txBody>
+                  <a:tcPr marL="50800" marR="50800" marT="50800" marB="50800">
+                    <a:lnL w="6350" cap="flat" cmpd="sng" algn="ctr">
+                      <a:solidFill>
+                        <a:srgbClr val="E2E7EE"/>
+                      </a:solidFill>
+                      <a:prstDash val="solid"/>
+                      <a:round/>
+                      <a:headEnd type="none" w="med" len="med"/>
+                      <a:tailEnd type="none" w="med" len="med"/>
+                    </a:lnL>
+                    <a:lnR w="6350" cap="flat" cmpd="sng" algn="ctr">
+                      <a:solidFill>
+                        <a:srgbClr val="E2E7EE"/>
+                      </a:solidFill>
+                      <a:prstDash val="solid"/>
+                      <a:round/>
+                      <a:headEnd type="none" w="med" len="med"/>
+                      <a:tailEnd type="none" w="med" len="med"/>
+                    </a:lnR>
+                    <a:lnT w="6350" cap="flat" cmpd="sng" algn="ctr">
+                      <a:solidFill>
+                        <a:srgbClr val="E2E7EE"/>
+                      </a:solidFill>
+                      <a:prstDash val="solid"/>
+                      <a:round/>
+                      <a:headEnd type="none" w="med" len="med"/>
+                      <a:tailEnd type="none" w="med" len="med"/>
+                    </a:lnT>
+                    <a:lnB w="6350" cap="flat" cmpd="sng" algn="ctr">
+                      <a:solidFill>
+                        <a:srgbClr val="E2E7EE"/>
+                      </a:solidFill>
+                      <a:prstDash val="solid"/>
+                      <a:round/>
+                      <a:headEnd type="none" w="med" len="med"/>
+                      <a:tailEnd type="none" w="med" len="med"/>
+                    </a:lnB>
+                  </a:tcPr>
+                </a:tc>
+                <a:tc>
+                  <a:txBody>
+                    <a:bodyPr/>
+                    <a:lstStyle/>
+                    <a:p>
+                      <a:pPr indent="0" marL="0">
+                        <a:buNone/>
+                      </a:pPr>
+                      <a:r>
+                        <a:rPr lang="en-US" sz="900" dirty="0">
+                          <a:solidFill>
+                            <a:srgbClr val="14181F"/>
+                          </a:solidFill>
+                        </a:rPr>
+                        <a:t>Delayed</a:t>
                       </a:r>
                       <a:endParaRPr lang="en-US" sz="900" dirty="0"/>
                     </a:p>
@@ -5203,651 +5555,181 @@
                             <a:srgbClr val="14181F"/>
                           </a:solidFill>
                         </a:rPr>
-                        <a:t>2025-11</a:t>
-                      </a:r>
-                      <a:endParaRPr lang="en-US" sz="900" dirty="0"/>
-                    </a:p>
-                  </a:txBody>
-                  <a:tcPr marL="50800" marR="50800" marT="50800" marB="50800">
-                    <a:lnL w="6350" cap="flat" cmpd="sng" algn="ctr">
-                      <a:solidFill>
-                        <a:srgbClr val="E2E7EE"/>
-                      </a:solidFill>
-                      <a:prstDash val="solid"/>
-                      <a:round/>
-                      <a:headEnd type="none" w="med" len="med"/>
-                      <a:tailEnd type="none" w="med" len="med"/>
-                    </a:lnL>
-                    <a:lnR w="6350" cap="flat" cmpd="sng" algn="ctr">
-                      <a:solidFill>
-                        <a:srgbClr val="E2E7EE"/>
-                      </a:solidFill>
-                      <a:prstDash val="solid"/>
-                      <a:round/>
-                      <a:headEnd type="none" w="med" len="med"/>
-                      <a:tailEnd type="none" w="med" len="med"/>
-                    </a:lnR>
-                    <a:lnT w="6350" cap="flat" cmpd="sng" algn="ctr">
-                      <a:solidFill>
-                        <a:srgbClr val="E2E7EE"/>
-                      </a:solidFill>
-                      <a:prstDash val="solid"/>
-                      <a:round/>
-                      <a:headEnd type="none" w="med" len="med"/>
-                      <a:tailEnd type="none" w="med" len="med"/>
-                    </a:lnT>
-                    <a:lnB w="6350" cap="flat" cmpd="sng" algn="ctr">
-                      <a:solidFill>
-                        <a:srgbClr val="E2E7EE"/>
-                      </a:solidFill>
-                      <a:prstDash val="solid"/>
-                      <a:round/>
-                      <a:headEnd type="none" w="med" len="med"/>
-                      <a:tailEnd type="none" w="med" len="med"/>
-                    </a:lnB>
-                  </a:tcPr>
-                </a:tc>
-                <a:tc>
-                  <a:txBody>
-                    <a:bodyPr/>
-                    <a:lstStyle/>
-                    <a:p>
-                      <a:pPr indent="0" marL="0">
-                        <a:buNone/>
-                      </a:pPr>
-                      <a:r>
-                        <a:rPr lang="en-US" sz="900" dirty="0">
-                          <a:solidFill>
-                            <a:srgbClr val="14181F"/>
-                          </a:solidFill>
-                        </a:rPr>
-                        <a:t>INR 5,98,75,000</a:t>
-                      </a:r>
-                      <a:endParaRPr lang="en-US" sz="900" dirty="0"/>
-                    </a:p>
-                  </a:txBody>
-                  <a:tcPr marL="50800" marR="50800" marT="50800" marB="50800">
-                    <a:lnL w="6350" cap="flat" cmpd="sng" algn="ctr">
-                      <a:solidFill>
-                        <a:srgbClr val="E2E7EE"/>
-                      </a:solidFill>
-                      <a:prstDash val="solid"/>
-                      <a:round/>
-                      <a:headEnd type="none" w="med" len="med"/>
-                      <a:tailEnd type="none" w="med" len="med"/>
-                    </a:lnL>
-                    <a:lnR w="6350" cap="flat" cmpd="sng" algn="ctr">
-                      <a:solidFill>
-                        <a:srgbClr val="E2E7EE"/>
-                      </a:solidFill>
-                      <a:prstDash val="solid"/>
-                      <a:round/>
-                      <a:headEnd type="none" w="med" len="med"/>
-                      <a:tailEnd type="none" w="med" len="med"/>
-                    </a:lnR>
-                    <a:lnT w="6350" cap="flat" cmpd="sng" algn="ctr">
-                      <a:solidFill>
-                        <a:srgbClr val="E2E7EE"/>
-                      </a:solidFill>
-                      <a:prstDash val="solid"/>
-                      <a:round/>
-                      <a:headEnd type="none" w="med" len="med"/>
-                      <a:tailEnd type="none" w="med" len="med"/>
-                    </a:lnT>
-                    <a:lnB w="6350" cap="flat" cmpd="sng" algn="ctr">
-                      <a:solidFill>
-                        <a:srgbClr val="E2E7EE"/>
-                      </a:solidFill>
-                      <a:prstDash val="solid"/>
-                      <a:round/>
-                      <a:headEnd type="none" w="med" len="med"/>
-                      <a:tailEnd type="none" w="med" len="med"/>
-                    </a:lnB>
-                  </a:tcPr>
-                </a:tc>
-                <a:tc>
-                  <a:txBody>
-                    <a:bodyPr/>
-                    <a:lstStyle/>
-                    <a:p>
-                      <a:pPr indent="0" marL="0">
-                        <a:buNone/>
-                      </a:pPr>
-                      <a:r>
-                        <a:rPr lang="en-US" sz="900" dirty="0">
-                          <a:solidFill>
-                            <a:srgbClr val="14181F"/>
-                          </a:solidFill>
-                        </a:rPr>
-                        <a:t>INR 14,37,00,000</a:t>
-                      </a:r>
-                      <a:endParaRPr lang="en-US" sz="900" dirty="0"/>
-                    </a:p>
-                  </a:txBody>
-                  <a:tcPr marL="50800" marR="50800" marT="50800" marB="50800">
-                    <a:lnL w="6350" cap="flat" cmpd="sng" algn="ctr">
-                      <a:solidFill>
-                        <a:srgbClr val="E2E7EE"/>
-                      </a:solidFill>
-                      <a:prstDash val="solid"/>
-                      <a:round/>
-                      <a:headEnd type="none" w="med" len="med"/>
-                      <a:tailEnd type="none" w="med" len="med"/>
-                    </a:lnL>
-                    <a:lnR w="6350" cap="flat" cmpd="sng" algn="ctr">
-                      <a:solidFill>
-                        <a:srgbClr val="E2E7EE"/>
-                      </a:solidFill>
-                      <a:prstDash val="solid"/>
-                      <a:round/>
-                      <a:headEnd type="none" w="med" len="med"/>
-                      <a:tailEnd type="none" w="med" len="med"/>
-                    </a:lnR>
-                    <a:lnT w="6350" cap="flat" cmpd="sng" algn="ctr">
-                      <a:solidFill>
-                        <a:srgbClr val="E2E7EE"/>
-                      </a:solidFill>
-                      <a:prstDash val="solid"/>
-                      <a:round/>
-                      <a:headEnd type="none" w="med" len="med"/>
-                      <a:tailEnd type="none" w="med" len="med"/>
-                    </a:lnT>
-                    <a:lnB w="6350" cap="flat" cmpd="sng" algn="ctr">
-                      <a:solidFill>
-                        <a:srgbClr val="E2E7EE"/>
-                      </a:solidFill>
-                      <a:prstDash val="solid"/>
-                      <a:round/>
-                      <a:headEnd type="none" w="med" len="med"/>
-                      <a:tailEnd type="none" w="med" len="med"/>
-                    </a:lnB>
-                  </a:tcPr>
-                </a:tc>
-              </a:tr>
-              <a:tr h="0">
-                <a:tc>
-                  <a:txBody>
-                    <a:bodyPr/>
-                    <a:lstStyle/>
-                    <a:p>
-                      <a:pPr indent="0" marL="0">
-                        <a:buNone/>
-                      </a:pPr>
-                      <a:r>
-                        <a:rPr lang="en-US" sz="900" dirty="0">
-                          <a:solidFill>
-                            <a:srgbClr val="14181F"/>
-                          </a:solidFill>
-                        </a:rPr>
-                        <a:t>2025-12</a:t>
-                      </a:r>
-                      <a:endParaRPr lang="en-US" sz="900" dirty="0"/>
-                    </a:p>
-                  </a:txBody>
-                  <a:tcPr marL="50800" marR="50800" marT="50800" marB="50800">
-                    <a:lnL w="6350" cap="flat" cmpd="sng" algn="ctr">
-                      <a:solidFill>
-                        <a:srgbClr val="E2E7EE"/>
-                      </a:solidFill>
-                      <a:prstDash val="solid"/>
-                      <a:round/>
-                      <a:headEnd type="none" w="med" len="med"/>
-                      <a:tailEnd type="none" w="med" len="med"/>
-                    </a:lnL>
-                    <a:lnR w="6350" cap="flat" cmpd="sng" algn="ctr">
-                      <a:solidFill>
-                        <a:srgbClr val="E2E7EE"/>
-                      </a:solidFill>
-                      <a:prstDash val="solid"/>
-                      <a:round/>
-                      <a:headEnd type="none" w="med" len="med"/>
-                      <a:tailEnd type="none" w="med" len="med"/>
-                    </a:lnR>
-                    <a:lnT w="6350" cap="flat" cmpd="sng" algn="ctr">
-                      <a:solidFill>
-                        <a:srgbClr val="E2E7EE"/>
-                      </a:solidFill>
-                      <a:prstDash val="solid"/>
-                      <a:round/>
-                      <a:headEnd type="none" w="med" len="med"/>
-                      <a:tailEnd type="none" w="med" len="med"/>
-                    </a:lnT>
-                    <a:lnB w="6350" cap="flat" cmpd="sng" algn="ctr">
-                      <a:solidFill>
-                        <a:srgbClr val="E2E7EE"/>
-                      </a:solidFill>
-                      <a:prstDash val="solid"/>
-                      <a:round/>
-                      <a:headEnd type="none" w="med" len="med"/>
-                      <a:tailEnd type="none" w="med" len="med"/>
-                    </a:lnB>
-                  </a:tcPr>
-                </a:tc>
-                <a:tc>
-                  <a:txBody>
-                    <a:bodyPr/>
-                    <a:lstStyle/>
-                    <a:p>
-                      <a:pPr indent="0" marL="0">
-                        <a:buNone/>
-                      </a:pPr>
-                      <a:r>
-                        <a:rPr lang="en-US" sz="900" dirty="0">
-                          <a:solidFill>
-                            <a:srgbClr val="14181F"/>
-                          </a:solidFill>
-                        </a:rPr>
-                        <a:t>INR 0</a:t>
-                      </a:r>
-                      <a:endParaRPr lang="en-US" sz="900" dirty="0"/>
-                    </a:p>
-                  </a:txBody>
-                  <a:tcPr marL="50800" marR="50800" marT="50800" marB="50800">
-                    <a:lnL w="6350" cap="flat" cmpd="sng" algn="ctr">
-                      <a:solidFill>
-                        <a:srgbClr val="E2E7EE"/>
-                      </a:solidFill>
-                      <a:prstDash val="solid"/>
-                      <a:round/>
-                      <a:headEnd type="none" w="med" len="med"/>
-                      <a:tailEnd type="none" w="med" len="med"/>
-                    </a:lnL>
-                    <a:lnR w="6350" cap="flat" cmpd="sng" algn="ctr">
-                      <a:solidFill>
-                        <a:srgbClr val="E2E7EE"/>
-                      </a:solidFill>
-                      <a:prstDash val="solid"/>
-                      <a:round/>
-                      <a:headEnd type="none" w="med" len="med"/>
-                      <a:tailEnd type="none" w="med" len="med"/>
-                    </a:lnR>
-                    <a:lnT w="6350" cap="flat" cmpd="sng" algn="ctr">
-                      <a:solidFill>
-                        <a:srgbClr val="E2E7EE"/>
-                      </a:solidFill>
-                      <a:prstDash val="solid"/>
-                      <a:round/>
-                      <a:headEnd type="none" w="med" len="med"/>
-                      <a:tailEnd type="none" w="med" len="med"/>
-                    </a:lnT>
-                    <a:lnB w="6350" cap="flat" cmpd="sng" algn="ctr">
-                      <a:solidFill>
-                        <a:srgbClr val="E2E7EE"/>
-                      </a:solidFill>
-                      <a:prstDash val="solid"/>
-                      <a:round/>
-                      <a:headEnd type="none" w="med" len="med"/>
-                      <a:tailEnd type="none" w="med" len="med"/>
-                    </a:lnB>
-                  </a:tcPr>
-                </a:tc>
-                <a:tc>
-                  <a:txBody>
-                    <a:bodyPr/>
-                    <a:lstStyle/>
-                    <a:p>
-                      <a:pPr indent="0" marL="0">
-                        <a:buNone/>
-                      </a:pPr>
-                      <a:r>
-                        <a:rPr lang="en-US" sz="900" dirty="0">
-                          <a:solidFill>
-                            <a:srgbClr val="14181F"/>
-                          </a:solidFill>
-                        </a:rPr>
-                        <a:t>INR 14,37,00,000</a:t>
-                      </a:r>
-                      <a:endParaRPr lang="en-US" sz="900" dirty="0"/>
-                    </a:p>
-                  </a:txBody>
-                  <a:tcPr marL="50800" marR="50800" marT="50800" marB="50800">
-                    <a:lnL w="6350" cap="flat" cmpd="sng" algn="ctr">
-                      <a:solidFill>
-                        <a:srgbClr val="E2E7EE"/>
-                      </a:solidFill>
-                      <a:prstDash val="solid"/>
-                      <a:round/>
-                      <a:headEnd type="none" w="med" len="med"/>
-                      <a:tailEnd type="none" w="med" len="med"/>
-                    </a:lnL>
-                    <a:lnR w="6350" cap="flat" cmpd="sng" algn="ctr">
-                      <a:solidFill>
-                        <a:srgbClr val="E2E7EE"/>
-                      </a:solidFill>
-                      <a:prstDash val="solid"/>
-                      <a:round/>
-                      <a:headEnd type="none" w="med" len="med"/>
-                      <a:tailEnd type="none" w="med" len="med"/>
-                    </a:lnR>
-                    <a:lnT w="6350" cap="flat" cmpd="sng" algn="ctr">
-                      <a:solidFill>
-                        <a:srgbClr val="E2E7EE"/>
-                      </a:solidFill>
-                      <a:prstDash val="solid"/>
-                      <a:round/>
-                      <a:headEnd type="none" w="med" len="med"/>
-                      <a:tailEnd type="none" w="med" len="med"/>
-                    </a:lnT>
-                    <a:lnB w="6350" cap="flat" cmpd="sng" algn="ctr">
-                      <a:solidFill>
-                        <a:srgbClr val="E2E7EE"/>
-                      </a:solidFill>
-                      <a:prstDash val="solid"/>
-                      <a:round/>
-                      <a:headEnd type="none" w="med" len="med"/>
-                      <a:tailEnd type="none" w="med" len="med"/>
-                    </a:lnB>
-                  </a:tcPr>
-                </a:tc>
-              </a:tr>
-              <a:tr h="0">
-                <a:tc>
-                  <a:txBody>
-                    <a:bodyPr/>
-                    <a:lstStyle/>
-                    <a:p>
-                      <a:pPr indent="0" marL="0">
-                        <a:buNone/>
-                      </a:pPr>
-                      <a:r>
-                        <a:rPr lang="en-US" sz="900" dirty="0">
-                          <a:solidFill>
-                            <a:srgbClr val="14181F"/>
-                          </a:solidFill>
-                        </a:rPr>
-                        <a:t>2026-01</a:t>
-                      </a:r>
-                      <a:endParaRPr lang="en-US" sz="900" dirty="0"/>
-                    </a:p>
-                  </a:txBody>
-                  <a:tcPr marL="50800" marR="50800" marT="50800" marB="50800">
-                    <a:lnL w="6350" cap="flat" cmpd="sng" algn="ctr">
-                      <a:solidFill>
-                        <a:srgbClr val="E2E7EE"/>
-                      </a:solidFill>
-                      <a:prstDash val="solid"/>
-                      <a:round/>
-                      <a:headEnd type="none" w="med" len="med"/>
-                      <a:tailEnd type="none" w="med" len="med"/>
-                    </a:lnL>
-                    <a:lnR w="6350" cap="flat" cmpd="sng" algn="ctr">
-                      <a:solidFill>
-                        <a:srgbClr val="E2E7EE"/>
-                      </a:solidFill>
-                      <a:prstDash val="solid"/>
-                      <a:round/>
-                      <a:headEnd type="none" w="med" len="med"/>
-                      <a:tailEnd type="none" w="med" len="med"/>
-                    </a:lnR>
-                    <a:lnT w="6350" cap="flat" cmpd="sng" algn="ctr">
-                      <a:solidFill>
-                        <a:srgbClr val="E2E7EE"/>
-                      </a:solidFill>
-                      <a:prstDash val="solid"/>
-                      <a:round/>
-                      <a:headEnd type="none" w="med" len="med"/>
-                      <a:tailEnd type="none" w="med" len="med"/>
-                    </a:lnT>
-                    <a:lnB w="6350" cap="flat" cmpd="sng" algn="ctr">
-                      <a:solidFill>
-                        <a:srgbClr val="E2E7EE"/>
-                      </a:solidFill>
-                      <a:prstDash val="solid"/>
-                      <a:round/>
-                      <a:headEnd type="none" w="med" len="med"/>
-                      <a:tailEnd type="none" w="med" len="med"/>
-                    </a:lnB>
-                  </a:tcPr>
-                </a:tc>
-                <a:tc>
-                  <a:txBody>
-                    <a:bodyPr/>
-                    <a:lstStyle/>
-                    <a:p>
-                      <a:pPr indent="0" marL="0">
-                        <a:buNone/>
-                      </a:pPr>
-                      <a:r>
-                        <a:rPr lang="en-US" sz="900" dirty="0">
-                          <a:solidFill>
-                            <a:srgbClr val="14181F"/>
-                          </a:solidFill>
-                        </a:rPr>
-                        <a:t>INR 5,98,75,000</a:t>
-                      </a:r>
-                      <a:endParaRPr lang="en-US" sz="900" dirty="0"/>
-                    </a:p>
-                  </a:txBody>
-                  <a:tcPr marL="50800" marR="50800" marT="50800" marB="50800">
-                    <a:lnL w="6350" cap="flat" cmpd="sng" algn="ctr">
-                      <a:solidFill>
-                        <a:srgbClr val="E2E7EE"/>
-                      </a:solidFill>
-                      <a:prstDash val="solid"/>
-                      <a:round/>
-                      <a:headEnd type="none" w="med" len="med"/>
-                      <a:tailEnd type="none" w="med" len="med"/>
-                    </a:lnL>
-                    <a:lnR w="6350" cap="flat" cmpd="sng" algn="ctr">
-                      <a:solidFill>
-                        <a:srgbClr val="E2E7EE"/>
-                      </a:solidFill>
-                      <a:prstDash val="solid"/>
-                      <a:round/>
-                      <a:headEnd type="none" w="med" len="med"/>
-                      <a:tailEnd type="none" w="med" len="med"/>
-                    </a:lnR>
-                    <a:lnT w="6350" cap="flat" cmpd="sng" algn="ctr">
-                      <a:solidFill>
-                        <a:srgbClr val="E2E7EE"/>
-                      </a:solidFill>
-                      <a:prstDash val="solid"/>
-                      <a:round/>
-                      <a:headEnd type="none" w="med" len="med"/>
-                      <a:tailEnd type="none" w="med" len="med"/>
-                    </a:lnT>
-                    <a:lnB w="6350" cap="flat" cmpd="sng" algn="ctr">
-                      <a:solidFill>
-                        <a:srgbClr val="E2E7EE"/>
-                      </a:solidFill>
-                      <a:prstDash val="solid"/>
-                      <a:round/>
-                      <a:headEnd type="none" w="med" len="med"/>
-                      <a:tailEnd type="none" w="med" len="med"/>
-                    </a:lnB>
-                  </a:tcPr>
-                </a:tc>
-                <a:tc>
-                  <a:txBody>
-                    <a:bodyPr/>
-                    <a:lstStyle/>
-                    <a:p>
-                      <a:pPr indent="0" marL="0">
-                        <a:buNone/>
-                      </a:pPr>
-                      <a:r>
-                        <a:rPr lang="en-US" sz="900" dirty="0">
-                          <a:solidFill>
-                            <a:srgbClr val="14181F"/>
-                          </a:solidFill>
-                        </a:rPr>
-                        <a:t>INR 20,35,75,000</a:t>
-                      </a:r>
-                      <a:endParaRPr lang="en-US" sz="900" dirty="0"/>
-                    </a:p>
-                  </a:txBody>
-                  <a:tcPr marL="50800" marR="50800" marT="50800" marB="50800">
-                    <a:lnL w="6350" cap="flat" cmpd="sng" algn="ctr">
-                      <a:solidFill>
-                        <a:srgbClr val="E2E7EE"/>
-                      </a:solidFill>
-                      <a:prstDash val="solid"/>
-                      <a:round/>
-                      <a:headEnd type="none" w="med" len="med"/>
-                      <a:tailEnd type="none" w="med" len="med"/>
-                    </a:lnL>
-                    <a:lnR w="6350" cap="flat" cmpd="sng" algn="ctr">
-                      <a:solidFill>
-                        <a:srgbClr val="E2E7EE"/>
-                      </a:solidFill>
-                      <a:prstDash val="solid"/>
-                      <a:round/>
-                      <a:headEnd type="none" w="med" len="med"/>
-                      <a:tailEnd type="none" w="med" len="med"/>
-                    </a:lnR>
-                    <a:lnT w="6350" cap="flat" cmpd="sng" algn="ctr">
-                      <a:solidFill>
-                        <a:srgbClr val="E2E7EE"/>
-                      </a:solidFill>
-                      <a:prstDash val="solid"/>
-                      <a:round/>
-                      <a:headEnd type="none" w="med" len="med"/>
-                      <a:tailEnd type="none" w="med" len="med"/>
-                    </a:lnT>
-                    <a:lnB w="6350" cap="flat" cmpd="sng" algn="ctr">
-                      <a:solidFill>
-                        <a:srgbClr val="E2E7EE"/>
-                      </a:solidFill>
-                      <a:prstDash val="solid"/>
-                      <a:round/>
-                      <a:headEnd type="none" w="med" len="med"/>
-                      <a:tailEnd type="none" w="med" len="med"/>
-                    </a:lnB>
-                  </a:tcPr>
-                </a:tc>
-              </a:tr>
-              <a:tr h="0">
-                <a:tc>
-                  <a:txBody>
-                    <a:bodyPr/>
-                    <a:lstStyle/>
-                    <a:p>
-                      <a:pPr indent="0" marL="0">
-                        <a:buNone/>
-                      </a:pPr>
-                      <a:r>
-                        <a:rPr lang="en-US" sz="900" dirty="0">
-                          <a:solidFill>
-                            <a:srgbClr val="14181F"/>
-                          </a:solidFill>
-                        </a:rPr>
-                        <a:t>2026-02</a:t>
-                      </a:r>
-                      <a:endParaRPr lang="en-US" sz="900" dirty="0"/>
-                    </a:p>
-                  </a:txBody>
-                  <a:tcPr marL="50800" marR="50800" marT="50800" marB="50800">
-                    <a:lnL w="6350" cap="flat" cmpd="sng" algn="ctr">
-                      <a:solidFill>
-                        <a:srgbClr val="E2E7EE"/>
-                      </a:solidFill>
-                      <a:prstDash val="solid"/>
-                      <a:round/>
-                      <a:headEnd type="none" w="med" len="med"/>
-                      <a:tailEnd type="none" w="med" len="med"/>
-                    </a:lnL>
-                    <a:lnR w="6350" cap="flat" cmpd="sng" algn="ctr">
-                      <a:solidFill>
-                        <a:srgbClr val="E2E7EE"/>
-                      </a:solidFill>
-                      <a:prstDash val="solid"/>
-                      <a:round/>
-                      <a:headEnd type="none" w="med" len="med"/>
-                      <a:tailEnd type="none" w="med" len="med"/>
-                    </a:lnR>
-                    <a:lnT w="6350" cap="flat" cmpd="sng" algn="ctr">
-                      <a:solidFill>
-                        <a:srgbClr val="E2E7EE"/>
-                      </a:solidFill>
-                      <a:prstDash val="solid"/>
-                      <a:round/>
-                      <a:headEnd type="none" w="med" len="med"/>
-                      <a:tailEnd type="none" w="med" len="med"/>
-                    </a:lnT>
-                    <a:lnB w="6350" cap="flat" cmpd="sng" algn="ctr">
-                      <a:solidFill>
-                        <a:srgbClr val="E2E7EE"/>
-                      </a:solidFill>
-                      <a:prstDash val="solid"/>
-                      <a:round/>
-                      <a:headEnd type="none" w="med" len="med"/>
-                      <a:tailEnd type="none" w="med" len="med"/>
-                    </a:lnB>
-                  </a:tcPr>
-                </a:tc>
-                <a:tc>
-                  <a:txBody>
-                    <a:bodyPr/>
-                    <a:lstStyle/>
-                    <a:p>
-                      <a:pPr indent="0" marL="0">
-                        <a:buNone/>
-                      </a:pPr>
-                      <a:r>
-                        <a:rPr lang="en-US" sz="900" dirty="0">
-                          <a:solidFill>
-                            <a:srgbClr val="14181F"/>
-                          </a:solidFill>
-                        </a:rPr>
-                        <a:t>INR 3,59,25,000</a:t>
-                      </a:r>
-                      <a:endParaRPr lang="en-US" sz="900" dirty="0"/>
-                    </a:p>
-                  </a:txBody>
-                  <a:tcPr marL="50800" marR="50800" marT="50800" marB="50800">
-                    <a:lnL w="6350" cap="flat" cmpd="sng" algn="ctr">
-                      <a:solidFill>
-                        <a:srgbClr val="E2E7EE"/>
-                      </a:solidFill>
-                      <a:prstDash val="solid"/>
-                      <a:round/>
-                      <a:headEnd type="none" w="med" len="med"/>
-                      <a:tailEnd type="none" w="med" len="med"/>
-                    </a:lnL>
-                    <a:lnR w="6350" cap="flat" cmpd="sng" algn="ctr">
-                      <a:solidFill>
-                        <a:srgbClr val="E2E7EE"/>
-                      </a:solidFill>
-                      <a:prstDash val="solid"/>
-                      <a:round/>
-                      <a:headEnd type="none" w="med" len="med"/>
-                      <a:tailEnd type="none" w="med" len="med"/>
-                    </a:lnR>
-                    <a:lnT w="6350" cap="flat" cmpd="sng" algn="ctr">
-                      <a:solidFill>
-                        <a:srgbClr val="E2E7EE"/>
-                      </a:solidFill>
-                      <a:prstDash val="solid"/>
-                      <a:round/>
-                      <a:headEnd type="none" w="med" len="med"/>
-                      <a:tailEnd type="none" w="med" len="med"/>
-                    </a:lnT>
-                    <a:lnB w="6350" cap="flat" cmpd="sng" algn="ctr">
-                      <a:solidFill>
-                        <a:srgbClr val="E2E7EE"/>
-                      </a:solidFill>
-                      <a:prstDash val="solid"/>
-                      <a:round/>
-                      <a:headEnd type="none" w="med" len="med"/>
-                      <a:tailEnd type="none" w="med" len="med"/>
-                    </a:lnB>
-                  </a:tcPr>
-                </a:tc>
-                <a:tc>
-                  <a:txBody>
-                    <a:bodyPr/>
-                    <a:lstStyle/>
-                    <a:p>
-                      <a:pPr indent="0" marL="0">
-                        <a:buNone/>
-                      </a:pPr>
-                      <a:r>
-                        <a:rPr lang="en-US" sz="900" dirty="0">
-                          <a:solidFill>
-                            <a:srgbClr val="14181F"/>
-                          </a:solidFill>
-                        </a:rPr>
-                        <a:t>INR 23,95,00,000</a:t>
+                        <a:t>RA6</a:t>
+                      </a:r>
+                      <a:endParaRPr lang="en-US" sz="900" dirty="0"/>
+                    </a:p>
+                  </a:txBody>
+                  <a:tcPr marL="50800" marR="50800" marT="50800" marB="50800">
+                    <a:lnL w="6350" cap="flat" cmpd="sng" algn="ctr">
+                      <a:solidFill>
+                        <a:srgbClr val="E2E7EE"/>
+                      </a:solidFill>
+                      <a:prstDash val="solid"/>
+                      <a:round/>
+                      <a:headEnd type="none" w="med" len="med"/>
+                      <a:tailEnd type="none" w="med" len="med"/>
+                    </a:lnL>
+                    <a:lnR w="6350" cap="flat" cmpd="sng" algn="ctr">
+                      <a:solidFill>
+                        <a:srgbClr val="E2E7EE"/>
+                      </a:solidFill>
+                      <a:prstDash val="solid"/>
+                      <a:round/>
+                      <a:headEnd type="none" w="med" len="med"/>
+                      <a:tailEnd type="none" w="med" len="med"/>
+                    </a:lnR>
+                    <a:lnT w="6350" cap="flat" cmpd="sng" algn="ctr">
+                      <a:solidFill>
+                        <a:srgbClr val="E2E7EE"/>
+                      </a:solidFill>
+                      <a:prstDash val="solid"/>
+                      <a:round/>
+                      <a:headEnd type="none" w="med" len="med"/>
+                      <a:tailEnd type="none" w="med" len="med"/>
+                    </a:lnT>
+                    <a:lnB w="6350" cap="flat" cmpd="sng" algn="ctr">
+                      <a:solidFill>
+                        <a:srgbClr val="E2E7EE"/>
+                      </a:solidFill>
+                      <a:prstDash val="solid"/>
+                      <a:round/>
+                      <a:headEnd type="none" w="med" len="med"/>
+                      <a:tailEnd type="none" w="med" len="med"/>
+                    </a:lnB>
+                  </a:tcPr>
+                </a:tc>
+                <a:tc>
+                  <a:txBody>
+                    <a:bodyPr/>
+                    <a:lstStyle/>
+                    <a:p>
+                      <a:pPr indent="0" marL="0">
+                        <a:buNone/>
+                      </a:pPr>
+                      <a:r>
+                        <a:rPr lang="en-US" sz="900" dirty="0">
+                          <a:solidFill>
+                            <a:srgbClr val="14181F"/>
+                          </a:solidFill>
+                        </a:rPr>
+                        <a:t>2026-02-23</a:t>
+                      </a:r>
+                      <a:endParaRPr lang="en-US" sz="900" dirty="0"/>
+                    </a:p>
+                  </a:txBody>
+                  <a:tcPr marL="50800" marR="50800" marT="50800" marB="50800">
+                    <a:lnL w="6350" cap="flat" cmpd="sng" algn="ctr">
+                      <a:solidFill>
+                        <a:srgbClr val="E2E7EE"/>
+                      </a:solidFill>
+                      <a:prstDash val="solid"/>
+                      <a:round/>
+                      <a:headEnd type="none" w="med" len="med"/>
+                      <a:tailEnd type="none" w="med" len="med"/>
+                    </a:lnL>
+                    <a:lnR w="6350" cap="flat" cmpd="sng" algn="ctr">
+                      <a:solidFill>
+                        <a:srgbClr val="E2E7EE"/>
+                      </a:solidFill>
+                      <a:prstDash val="solid"/>
+                      <a:round/>
+                      <a:headEnd type="none" w="med" len="med"/>
+                      <a:tailEnd type="none" w="med" len="med"/>
+                    </a:lnR>
+                    <a:lnT w="6350" cap="flat" cmpd="sng" algn="ctr">
+                      <a:solidFill>
+                        <a:srgbClr val="E2E7EE"/>
+                      </a:solidFill>
+                      <a:prstDash val="solid"/>
+                      <a:round/>
+                      <a:headEnd type="none" w="med" len="med"/>
+                      <a:tailEnd type="none" w="med" len="med"/>
+                    </a:lnT>
+                    <a:lnB w="6350" cap="flat" cmpd="sng" algn="ctr">
+                      <a:solidFill>
+                        <a:srgbClr val="E2E7EE"/>
+                      </a:solidFill>
+                      <a:prstDash val="solid"/>
+                      <a:round/>
+                      <a:headEnd type="none" w="med" len="med"/>
+                      <a:tailEnd type="none" w="med" len="med"/>
+                    </a:lnB>
+                  </a:tcPr>
+                </a:tc>
+                <a:tc>
+                  <a:txBody>
+                    <a:bodyPr/>
+                    <a:lstStyle/>
+                    <a:p>
+                      <a:pPr indent="0" marL="0">
+                        <a:buNone/>
+                      </a:pPr>
+                      <a:r>
+                        <a:rPr lang="en-US" sz="900" dirty="0">
+                          <a:solidFill>
+                            <a:srgbClr val="14181F"/>
+                          </a:solidFill>
+                        </a:rPr>
+                        <a:t>15%</a:t>
+                      </a:r>
+                      <a:endParaRPr lang="en-US" sz="900" dirty="0"/>
+                    </a:p>
+                  </a:txBody>
+                  <a:tcPr marL="50800" marR="50800" marT="50800" marB="50800">
+                    <a:lnL w="6350" cap="flat" cmpd="sng" algn="ctr">
+                      <a:solidFill>
+                        <a:srgbClr val="E2E7EE"/>
+                      </a:solidFill>
+                      <a:prstDash val="solid"/>
+                      <a:round/>
+                      <a:headEnd type="none" w="med" len="med"/>
+                      <a:tailEnd type="none" w="med" len="med"/>
+                    </a:lnL>
+                    <a:lnR w="6350" cap="flat" cmpd="sng" algn="ctr">
+                      <a:solidFill>
+                        <a:srgbClr val="E2E7EE"/>
+                      </a:solidFill>
+                      <a:prstDash val="solid"/>
+                      <a:round/>
+                      <a:headEnd type="none" w="med" len="med"/>
+                      <a:tailEnd type="none" w="med" len="med"/>
+                    </a:lnR>
+                    <a:lnT w="6350" cap="flat" cmpd="sng" algn="ctr">
+                      <a:solidFill>
+                        <a:srgbClr val="E2E7EE"/>
+                      </a:solidFill>
+                      <a:prstDash val="solid"/>
+                      <a:round/>
+                      <a:headEnd type="none" w="med" len="med"/>
+                      <a:tailEnd type="none" w="med" len="med"/>
+                    </a:lnT>
+                    <a:lnB w="6350" cap="flat" cmpd="sng" algn="ctr">
+                      <a:solidFill>
+                        <a:srgbClr val="E2E7EE"/>
+                      </a:solidFill>
+                      <a:prstDash val="solid"/>
+                      <a:round/>
+                      <a:headEnd type="none" w="med" len="med"/>
+                      <a:tailEnd type="none" w="med" len="med"/>
+                    </a:lnB>
+                  </a:tcPr>
+                </a:tc>
+                <a:tc>
+                  <a:txBody>
+                    <a:bodyPr/>
+                    <a:lstStyle/>
+                    <a:p>
+                      <a:pPr indent="0" marL="0">
+                        <a:buNone/>
+                      </a:pPr>
+                      <a:r>
+                        <a:rPr lang="en-US" sz="900" dirty="0">
+                          <a:solidFill>
+                            <a:srgbClr val="14181F"/>
+                          </a:solidFill>
+                        </a:rPr>
+                        <a:t>Delayed</a:t>
                       </a:r>
                       <a:endParaRPr lang="en-US" sz="900" dirty="0"/>
                     </a:p>

--- a/sample-output/emirates-client-deck.pptx
+++ b/sample-output/emirates-client-deck.pptx
@@ -19,9 +19,10 @@
     <p:sldId id="267" r:id="rId13"/>
     <p:sldId id="268" r:id="rId14"/>
     <p:sldId id="269" r:id="rId15"/>
+    <p:sldId id="270" r:id="rId16"/>
   </p:sldIdLst>
   <p:notesMasterIdLst>
-    <p:notesMasterId r:id="rId16"/>
+    <p:notesMasterId r:id="rId17"/>
   </p:notesMasterIdLst>
   <p:sldSz cx="9144000" cy="5143500"/>
   <p:notesSz cx="5143500" cy="9144000"/>
@@ -979,6 +980,94 @@
             <a:fld id="{F7021451-1387-4CA6-816F-3879F97B5CBC}" type="slidenum">
               <a:rPr lang="en-US"/>
               <a:t>14</a:t>
+            </a:fld>
+            <a:endParaRPr lang="en-US"/>
+          </a:p>
+        </p:txBody>
+      </p:sp>
+    </p:spTree>
+    <p:extLst>
+      <p:ext uri="{BB962C8B-B14F-4D97-AF65-F5344CB8AC3E}">
+        <p14:creationId xmlns:p14="http://schemas.microsoft.com/office/powerpoint/2010/main" val="1024086991"/>
+      </p:ext>
+    </p:extLst>
+  </p:cSld>
+  <p:clrMapOvr>
+    <a:masterClrMapping/>
+  </p:clrMapOvr>
+</p:notes>
+</file>
+
+<file path=ppt/notesSlides/notesSlide15.xml><?xml version="1.0" encoding="utf-8"?>
+<p:notes xmlns:a="http://schemas.openxmlformats.org/drawingml/2006/main" xmlns:r="http://schemas.openxmlformats.org/officeDocument/2006/relationships" xmlns:p="http://schemas.openxmlformats.org/presentationml/2006/main">
+  <p:cSld>
+    <p:spTree>
+      <p:nvGrpSpPr>
+        <p:cNvPr id="1" name=""/>
+        <p:cNvGrpSpPr/>
+        <p:nvPr/>
+      </p:nvGrpSpPr>
+      <p:grpSpPr>
+        <a:xfrm>
+          <a:off x="0" y="0"/>
+          <a:ext cx="0" cy="0"/>
+          <a:chOff x="0" y="0"/>
+          <a:chExt cx="0" cy="0"/>
+        </a:xfrm>
+      </p:grpSpPr>
+      <p:sp>
+        <p:nvSpPr>
+          <p:cNvPr id="2" name="Slide Image Placeholder 1"/>
+          <p:cNvSpPr>
+            <a:spLocks noGrp="1" noRot="1" noChangeAspect="1"/>
+          </p:cNvSpPr>
+          <p:nvPr>
+            <p:ph type="sldImg"/>
+          </p:nvPr>
+        </p:nvSpPr>
+        <p:spPr/>
+      </p:sp>
+      <p:sp>
+        <p:nvSpPr>
+          <p:cNvPr id="3" name="Notes Placeholder 2"/>
+          <p:cNvSpPr>
+            <a:spLocks noGrp="1"/>
+          </p:cNvSpPr>
+          <p:nvPr>
+            <p:ph type="body" idx="1"/>
+          </p:nvPr>
+        </p:nvSpPr>
+        <p:spPr/>
+        <p:txBody>
+          <a:bodyPr/>
+          <a:lstStyle/>
+          <a:p>
+            <a:r>
+              <a:rPr lang="en-US" dirty="0"/>
+              <a:t/>
+            </a:r>
+            <a:endParaRPr lang="en-US" dirty="0"/>
+          </a:p>
+        </p:txBody>
+      </p:sp>
+      <p:sp>
+        <p:nvSpPr>
+          <p:cNvPr id="4" name="Slide Number Placeholder 3"/>
+          <p:cNvSpPr>
+            <a:spLocks noGrp="1"/>
+          </p:cNvSpPr>
+          <p:nvPr>
+            <p:ph type="sldNum" sz="quarter" idx="10"/>
+          </p:nvPr>
+        </p:nvSpPr>
+        <p:spPr/>
+        <p:txBody>
+          <a:bodyPr/>
+          <a:lstStyle/>
+          <a:p>
+            <a:fld id="{F7021451-1387-4CA6-816F-3879F97B5CBC}" type="slidenum">
+              <a:rPr lang="en-US"/>
+              <a:t>15</a:t>
             </a:fld>
             <a:endParaRPr lang="en-US"/>
           </a:p>
@@ -13624,6 +13713,1535 @@
                   <a:srgbClr val="14181F"/>
                 </a:solidFill>
               </a:rPr>
+              <a:t>Material you supply to us — free issue</a:t>
+            </a:r>
+            <a:endParaRPr lang="en-US" sz="2200" dirty="0"/>
+          </a:p>
+        </p:txBody>
+      </p:sp>
+      <p:graphicFrame>
+        <p:nvGraphicFramePr>
+          <p:cNvPr id="15" name="Table 0"/>
+          <p:cNvGraphicFramePr>
+            <a:graphicFrameLocks noGrp="1"/>
+          </p:cNvGraphicFramePr>
+          <p:nvPr>
+            <p:extLst>
+              <p:ext uri="{D42A27DB-BD31-4B8C-83A1-F6EECF244321}">
+                <p14:modId xmlns:p14="http://schemas.microsoft.com/office/powerpoint/2010/main" val="1579011935"/>
+              </p:ext>
+            </p:extLst>
+          </p:nvPr>
+        </p:nvGraphicFramePr>
+        <p:xfrm>
+          <a:off x="457200" y="960120"/>
+          <a:ext cx="11247120" cy="914400"/>
+        </p:xfrm>
+        <a:graphic>
+          <a:graphicData uri="http://schemas.openxmlformats.org/drawingml/2006/table">
+            <a:tbl>
+              <a:tblPr/>
+              <a:tblGrid>
+                <a:gridCol w="5669280"/>
+                <a:gridCol w="1280160"/>
+                <a:gridCol w="2194560"/>
+                <a:gridCol w="2103120"/>
+              </a:tblGrid>
+              <a:tr h="0">
+                <a:tc>
+                  <a:txBody>
+                    <a:bodyPr/>
+                    <a:lstStyle/>
+                    <a:p>
+                      <a:pPr indent="0" marL="0">
+                        <a:buNone/>
+                      </a:pPr>
+                      <a:r>
+                        <a:rPr lang="en-US" sz="900" b="1" dirty="0">
+                          <a:solidFill>
+                            <a:srgbClr val="5A6472"/>
+                          </a:solidFill>
+                        </a:rPr>
+                        <a:t>Material</a:t>
+                      </a:r>
+                      <a:endParaRPr lang="en-US" sz="900" dirty="0"/>
+                    </a:p>
+                  </a:txBody>
+                  <a:tcPr marL="50800" marR="50800" marT="50800" marB="50800">
+                    <a:lnL w="6350" cap="flat" cmpd="sng" algn="ctr">
+                      <a:solidFill>
+                        <a:srgbClr val="E2E7EE"/>
+                      </a:solidFill>
+                      <a:prstDash val="solid"/>
+                      <a:round/>
+                      <a:headEnd type="none" w="med" len="med"/>
+                      <a:tailEnd type="none" w="med" len="med"/>
+                    </a:lnL>
+                    <a:lnR w="6350" cap="flat" cmpd="sng" algn="ctr">
+                      <a:solidFill>
+                        <a:srgbClr val="E2E7EE"/>
+                      </a:solidFill>
+                      <a:prstDash val="solid"/>
+                      <a:round/>
+                      <a:headEnd type="none" w="med" len="med"/>
+                      <a:tailEnd type="none" w="med" len="med"/>
+                    </a:lnR>
+                    <a:lnT w="6350" cap="flat" cmpd="sng" algn="ctr">
+                      <a:solidFill>
+                        <a:srgbClr val="E2E7EE"/>
+                      </a:solidFill>
+                      <a:prstDash val="solid"/>
+                      <a:round/>
+                      <a:headEnd type="none" w="med" len="med"/>
+                      <a:tailEnd type="none" w="med" len="med"/>
+                    </a:lnT>
+                    <a:lnB w="6350" cap="flat" cmpd="sng" algn="ctr">
+                      <a:solidFill>
+                        <a:srgbClr val="E2E7EE"/>
+                      </a:solidFill>
+                      <a:prstDash val="solid"/>
+                      <a:round/>
+                      <a:headEnd type="none" w="med" len="med"/>
+                      <a:tailEnd type="none" w="med" len="med"/>
+                    </a:lnB>
+                    <a:solidFill>
+                      <a:srgbClr val="F2F4F7"/>
+                    </a:solidFill>
+                  </a:tcPr>
+                </a:tc>
+                <a:tc>
+                  <a:txBody>
+                    <a:bodyPr/>
+                    <a:lstStyle/>
+                    <a:p>
+                      <a:pPr indent="0" marL="0">
+                        <a:buNone/>
+                      </a:pPr>
+                      <a:r>
+                        <a:rPr lang="en-US" sz="900" b="1" dirty="0">
+                          <a:solidFill>
+                            <a:srgbClr val="5A6472"/>
+                          </a:solidFill>
+                        </a:rPr>
+                        <a:t>Unit</a:t>
+                      </a:r>
+                      <a:endParaRPr lang="en-US" sz="900" dirty="0"/>
+                    </a:p>
+                  </a:txBody>
+                  <a:tcPr marL="50800" marR="50800" marT="50800" marB="50800">
+                    <a:lnL w="6350" cap="flat" cmpd="sng" algn="ctr">
+                      <a:solidFill>
+                        <a:srgbClr val="E2E7EE"/>
+                      </a:solidFill>
+                      <a:prstDash val="solid"/>
+                      <a:round/>
+                      <a:headEnd type="none" w="med" len="med"/>
+                      <a:tailEnd type="none" w="med" len="med"/>
+                    </a:lnL>
+                    <a:lnR w="6350" cap="flat" cmpd="sng" algn="ctr">
+                      <a:solidFill>
+                        <a:srgbClr val="E2E7EE"/>
+                      </a:solidFill>
+                      <a:prstDash val="solid"/>
+                      <a:round/>
+                      <a:headEnd type="none" w="med" len="med"/>
+                      <a:tailEnd type="none" w="med" len="med"/>
+                    </a:lnR>
+                    <a:lnT w="6350" cap="flat" cmpd="sng" algn="ctr">
+                      <a:solidFill>
+                        <a:srgbClr val="E2E7EE"/>
+                      </a:solidFill>
+                      <a:prstDash val="solid"/>
+                      <a:round/>
+                      <a:headEnd type="none" w="med" len="med"/>
+                      <a:tailEnd type="none" w="med" len="med"/>
+                    </a:lnT>
+                    <a:lnB w="6350" cap="flat" cmpd="sng" algn="ctr">
+                      <a:solidFill>
+                        <a:srgbClr val="E2E7EE"/>
+                      </a:solidFill>
+                      <a:prstDash val="solid"/>
+                      <a:round/>
+                      <a:headEnd type="none" w="med" len="med"/>
+                      <a:tailEnd type="none" w="med" len="med"/>
+                    </a:lnB>
+                    <a:solidFill>
+                      <a:srgbClr val="F2F4F7"/>
+                    </a:solidFill>
+                  </a:tcPr>
+                </a:tc>
+                <a:tc>
+                  <a:txBody>
+                    <a:bodyPr/>
+                    <a:lstStyle/>
+                    <a:p>
+                      <a:pPr indent="0" marL="0">
+                        <a:buNone/>
+                      </a:pPr>
+                      <a:r>
+                        <a:rPr lang="en-US" sz="900" b="1" dirty="0">
+                          <a:solidFill>
+                            <a:srgbClr val="5A6472"/>
+                          </a:solidFill>
+                        </a:rPr>
+                        <a:t>Required on site</a:t>
+                      </a:r>
+                      <a:endParaRPr lang="en-US" sz="900" dirty="0"/>
+                    </a:p>
+                  </a:txBody>
+                  <a:tcPr marL="50800" marR="50800" marT="50800" marB="50800">
+                    <a:lnL w="6350" cap="flat" cmpd="sng" algn="ctr">
+                      <a:solidFill>
+                        <a:srgbClr val="E2E7EE"/>
+                      </a:solidFill>
+                      <a:prstDash val="solid"/>
+                      <a:round/>
+                      <a:headEnd type="none" w="med" len="med"/>
+                      <a:tailEnd type="none" w="med" len="med"/>
+                    </a:lnL>
+                    <a:lnR w="6350" cap="flat" cmpd="sng" algn="ctr">
+                      <a:solidFill>
+                        <a:srgbClr val="E2E7EE"/>
+                      </a:solidFill>
+                      <a:prstDash val="solid"/>
+                      <a:round/>
+                      <a:headEnd type="none" w="med" len="med"/>
+                      <a:tailEnd type="none" w="med" len="med"/>
+                    </a:lnR>
+                    <a:lnT w="6350" cap="flat" cmpd="sng" algn="ctr">
+                      <a:solidFill>
+                        <a:srgbClr val="E2E7EE"/>
+                      </a:solidFill>
+                      <a:prstDash val="solid"/>
+                      <a:round/>
+                      <a:headEnd type="none" w="med" len="med"/>
+                      <a:tailEnd type="none" w="med" len="med"/>
+                    </a:lnT>
+                    <a:lnB w="6350" cap="flat" cmpd="sng" algn="ctr">
+                      <a:solidFill>
+                        <a:srgbClr val="E2E7EE"/>
+                      </a:solidFill>
+                      <a:prstDash val="solid"/>
+                      <a:round/>
+                      <a:headEnd type="none" w="med" len="med"/>
+                      <a:tailEnd type="none" w="med" len="med"/>
+                    </a:lnB>
+                    <a:solidFill>
+                      <a:srgbClr val="F2F4F7"/>
+                    </a:solidFill>
+                  </a:tcPr>
+                </a:tc>
+                <a:tc>
+                  <a:txBody>
+                    <a:bodyPr/>
+                    <a:lstStyle/>
+                    <a:p>
+                      <a:pPr indent="0" marL="0">
+                        <a:buNone/>
+                      </a:pPr>
+                      <a:r>
+                        <a:rPr lang="en-US" sz="900" b="1" dirty="0">
+                          <a:solidFill>
+                            <a:srgbClr val="5A6472"/>
+                          </a:solidFill>
+                        </a:rPr>
+                        <a:t>Status</a:t>
+                      </a:r>
+                      <a:endParaRPr lang="en-US" sz="900" dirty="0"/>
+                    </a:p>
+                  </a:txBody>
+                  <a:tcPr marL="50800" marR="50800" marT="50800" marB="50800">
+                    <a:lnL w="6350" cap="flat" cmpd="sng" algn="ctr">
+                      <a:solidFill>
+                        <a:srgbClr val="E2E7EE"/>
+                      </a:solidFill>
+                      <a:prstDash val="solid"/>
+                      <a:round/>
+                      <a:headEnd type="none" w="med" len="med"/>
+                      <a:tailEnd type="none" w="med" len="med"/>
+                    </a:lnL>
+                    <a:lnR w="6350" cap="flat" cmpd="sng" algn="ctr">
+                      <a:solidFill>
+                        <a:srgbClr val="E2E7EE"/>
+                      </a:solidFill>
+                      <a:prstDash val="solid"/>
+                      <a:round/>
+                      <a:headEnd type="none" w="med" len="med"/>
+                      <a:tailEnd type="none" w="med" len="med"/>
+                    </a:lnR>
+                    <a:lnT w="6350" cap="flat" cmpd="sng" algn="ctr">
+                      <a:solidFill>
+                        <a:srgbClr val="E2E7EE"/>
+                      </a:solidFill>
+                      <a:prstDash val="solid"/>
+                      <a:round/>
+                      <a:headEnd type="none" w="med" len="med"/>
+                      <a:tailEnd type="none" w="med" len="med"/>
+                    </a:lnT>
+                    <a:lnB w="6350" cap="flat" cmpd="sng" algn="ctr">
+                      <a:solidFill>
+                        <a:srgbClr val="E2E7EE"/>
+                      </a:solidFill>
+                      <a:prstDash val="solid"/>
+                      <a:round/>
+                      <a:headEnd type="none" w="med" len="med"/>
+                      <a:tailEnd type="none" w="med" len="med"/>
+                    </a:lnB>
+                    <a:solidFill>
+                      <a:srgbClr val="F2F4F7"/>
+                    </a:solidFill>
+                  </a:tcPr>
+                </a:tc>
+              </a:tr>
+              <a:tr h="0">
+                <a:tc>
+                  <a:txBody>
+                    <a:bodyPr/>
+                    <a:lstStyle/>
+                    <a:p>
+                      <a:pPr indent="0" marL="0">
+                        <a:buNone/>
+                      </a:pPr>
+                      <a:r>
+                        <a:rPr lang="en-US" sz="900" dirty="0">
+                          <a:solidFill>
+                            <a:srgbClr val="14181F"/>
+                          </a:solidFill>
+                        </a:rPr>
+                        <a:t>IT hardware — desktops, laptops, printers</a:t>
+                      </a:r>
+                      <a:endParaRPr lang="en-US" sz="900" dirty="0"/>
+                    </a:p>
+                  </a:txBody>
+                  <a:tcPr marL="50800" marR="50800" marT="50800" marB="50800">
+                    <a:lnL w="6350" cap="flat" cmpd="sng" algn="ctr">
+                      <a:solidFill>
+                        <a:srgbClr val="E2E7EE"/>
+                      </a:solidFill>
+                      <a:prstDash val="solid"/>
+                      <a:round/>
+                      <a:headEnd type="none" w="med" len="med"/>
+                      <a:tailEnd type="none" w="med" len="med"/>
+                    </a:lnL>
+                    <a:lnR w="6350" cap="flat" cmpd="sng" algn="ctr">
+                      <a:solidFill>
+                        <a:srgbClr val="E2E7EE"/>
+                      </a:solidFill>
+                      <a:prstDash val="solid"/>
+                      <a:round/>
+                      <a:headEnd type="none" w="med" len="med"/>
+                      <a:tailEnd type="none" w="med" len="med"/>
+                    </a:lnR>
+                    <a:lnT w="6350" cap="flat" cmpd="sng" algn="ctr">
+                      <a:solidFill>
+                        <a:srgbClr val="E2E7EE"/>
+                      </a:solidFill>
+                      <a:prstDash val="solid"/>
+                      <a:round/>
+                      <a:headEnd type="none" w="med" len="med"/>
+                      <a:tailEnd type="none" w="med" len="med"/>
+                    </a:lnT>
+                    <a:lnB w="6350" cap="flat" cmpd="sng" algn="ctr">
+                      <a:solidFill>
+                        <a:srgbClr val="E2E7EE"/>
+                      </a:solidFill>
+                      <a:prstDash val="solid"/>
+                      <a:round/>
+                      <a:headEnd type="none" w="med" len="med"/>
+                      <a:tailEnd type="none" w="med" len="med"/>
+                    </a:lnB>
+                  </a:tcPr>
+                </a:tc>
+                <a:tc>
+                  <a:txBody>
+                    <a:bodyPr/>
+                    <a:lstStyle/>
+                    <a:p>
+                      <a:pPr indent="0" marL="0">
+                        <a:buNone/>
+                      </a:pPr>
+                      <a:r>
+                        <a:rPr lang="en-US" sz="900" dirty="0">
+                          <a:solidFill>
+                            <a:srgbClr val="14181F"/>
+                          </a:solidFill>
+                        </a:rPr>
+                        <a:t>nos</a:t>
+                      </a:r>
+                      <a:endParaRPr lang="en-US" sz="900" dirty="0"/>
+                    </a:p>
+                  </a:txBody>
+                  <a:tcPr marL="50800" marR="50800" marT="50800" marB="50800">
+                    <a:lnL w="6350" cap="flat" cmpd="sng" algn="ctr">
+                      <a:solidFill>
+                        <a:srgbClr val="E2E7EE"/>
+                      </a:solidFill>
+                      <a:prstDash val="solid"/>
+                      <a:round/>
+                      <a:headEnd type="none" w="med" len="med"/>
+                      <a:tailEnd type="none" w="med" len="med"/>
+                    </a:lnL>
+                    <a:lnR w="6350" cap="flat" cmpd="sng" algn="ctr">
+                      <a:solidFill>
+                        <a:srgbClr val="E2E7EE"/>
+                      </a:solidFill>
+                      <a:prstDash val="solid"/>
+                      <a:round/>
+                      <a:headEnd type="none" w="med" len="med"/>
+                      <a:tailEnd type="none" w="med" len="med"/>
+                    </a:lnR>
+                    <a:lnT w="6350" cap="flat" cmpd="sng" algn="ctr">
+                      <a:solidFill>
+                        <a:srgbClr val="E2E7EE"/>
+                      </a:solidFill>
+                      <a:prstDash val="solid"/>
+                      <a:round/>
+                      <a:headEnd type="none" w="med" len="med"/>
+                      <a:tailEnd type="none" w="med" len="med"/>
+                    </a:lnT>
+                    <a:lnB w="6350" cap="flat" cmpd="sng" algn="ctr">
+                      <a:solidFill>
+                        <a:srgbClr val="E2E7EE"/>
+                      </a:solidFill>
+                      <a:prstDash val="solid"/>
+                      <a:round/>
+                      <a:headEnd type="none" w="med" len="med"/>
+                      <a:tailEnd type="none" w="med" len="med"/>
+                    </a:lnB>
+                  </a:tcPr>
+                </a:tc>
+                <a:tc>
+                  <a:txBody>
+                    <a:bodyPr/>
+                    <a:lstStyle/>
+                    <a:p>
+                      <a:pPr indent="0" marL="0">
+                        <a:buNone/>
+                      </a:pPr>
+                      <a:r>
+                        <a:rPr lang="en-US" sz="900" dirty="0">
+                          <a:solidFill>
+                            <a:srgbClr val="14181F"/>
+                          </a:solidFill>
+                        </a:rPr>
+                        <a:t>2025-11-19</a:t>
+                      </a:r>
+                      <a:endParaRPr lang="en-US" sz="900" dirty="0"/>
+                    </a:p>
+                  </a:txBody>
+                  <a:tcPr marL="50800" marR="50800" marT="50800" marB="50800">
+                    <a:lnL w="6350" cap="flat" cmpd="sng" algn="ctr">
+                      <a:solidFill>
+                        <a:srgbClr val="E2E7EE"/>
+                      </a:solidFill>
+                      <a:prstDash val="solid"/>
+                      <a:round/>
+                      <a:headEnd type="none" w="med" len="med"/>
+                      <a:tailEnd type="none" w="med" len="med"/>
+                    </a:lnL>
+                    <a:lnR w="6350" cap="flat" cmpd="sng" algn="ctr">
+                      <a:solidFill>
+                        <a:srgbClr val="E2E7EE"/>
+                      </a:solidFill>
+                      <a:prstDash val="solid"/>
+                      <a:round/>
+                      <a:headEnd type="none" w="med" len="med"/>
+                      <a:tailEnd type="none" w="med" len="med"/>
+                    </a:lnR>
+                    <a:lnT w="6350" cap="flat" cmpd="sng" algn="ctr">
+                      <a:solidFill>
+                        <a:srgbClr val="E2E7EE"/>
+                      </a:solidFill>
+                      <a:prstDash val="solid"/>
+                      <a:round/>
+                      <a:headEnd type="none" w="med" len="med"/>
+                      <a:tailEnd type="none" w="med" len="med"/>
+                    </a:lnT>
+                    <a:lnB w="6350" cap="flat" cmpd="sng" algn="ctr">
+                      <a:solidFill>
+                        <a:srgbClr val="E2E7EE"/>
+                      </a:solidFill>
+                      <a:prstDash val="solid"/>
+                      <a:round/>
+                      <a:headEnd type="none" w="med" len="med"/>
+                      <a:tailEnd type="none" w="med" len="med"/>
+                    </a:lnB>
+                  </a:tcPr>
+                </a:tc>
+                <a:tc>
+                  <a:txBody>
+                    <a:bodyPr/>
+                    <a:lstStyle/>
+                    <a:p>
+                      <a:pPr indent="0" marL="0">
+                        <a:buNone/>
+                      </a:pPr>
+                      <a:r>
+                        <a:rPr lang="en-US" sz="900" dirty="0">
+                          <a:solidFill>
+                            <a:srgbClr val="14181F"/>
+                          </a:solidFill>
+                        </a:rPr>
+                        <a:t>Not Ordered</a:t>
+                      </a:r>
+                      <a:endParaRPr lang="en-US" sz="900" dirty="0"/>
+                    </a:p>
+                  </a:txBody>
+                  <a:tcPr marL="50800" marR="50800" marT="50800" marB="50800">
+                    <a:lnL w="6350" cap="flat" cmpd="sng" algn="ctr">
+                      <a:solidFill>
+                        <a:srgbClr val="E2E7EE"/>
+                      </a:solidFill>
+                      <a:prstDash val="solid"/>
+                      <a:round/>
+                      <a:headEnd type="none" w="med" len="med"/>
+                      <a:tailEnd type="none" w="med" len="med"/>
+                    </a:lnL>
+                    <a:lnR w="6350" cap="flat" cmpd="sng" algn="ctr">
+                      <a:solidFill>
+                        <a:srgbClr val="E2E7EE"/>
+                      </a:solidFill>
+                      <a:prstDash val="solid"/>
+                      <a:round/>
+                      <a:headEnd type="none" w="med" len="med"/>
+                      <a:tailEnd type="none" w="med" len="med"/>
+                    </a:lnR>
+                    <a:lnT w="6350" cap="flat" cmpd="sng" algn="ctr">
+                      <a:solidFill>
+                        <a:srgbClr val="E2E7EE"/>
+                      </a:solidFill>
+                      <a:prstDash val="solid"/>
+                      <a:round/>
+                      <a:headEnd type="none" w="med" len="med"/>
+                      <a:tailEnd type="none" w="med" len="med"/>
+                    </a:lnT>
+                    <a:lnB w="6350" cap="flat" cmpd="sng" algn="ctr">
+                      <a:solidFill>
+                        <a:srgbClr val="E2E7EE"/>
+                      </a:solidFill>
+                      <a:prstDash val="solid"/>
+                      <a:round/>
+                      <a:headEnd type="none" w="med" len="med"/>
+                      <a:tailEnd type="none" w="med" len="med"/>
+                    </a:lnB>
+                  </a:tcPr>
+                </a:tc>
+              </a:tr>
+              <a:tr h="0">
+                <a:tc>
+                  <a:txBody>
+                    <a:bodyPr/>
+                    <a:lstStyle/>
+                    <a:p>
+                      <a:pPr indent="0" marL="0">
+                        <a:buNone/>
+                      </a:pPr>
+                      <a:r>
+                        <a:rPr lang="en-US" sz="900" dirty="0">
+                          <a:solidFill>
+                            <a:srgbClr val="14181F"/>
+                          </a:solidFill>
+                        </a:rPr>
+                        <a:t>Active network components — switches, routers, firewall</a:t>
+                      </a:r>
+                      <a:endParaRPr lang="en-US" sz="900" dirty="0"/>
+                    </a:p>
+                  </a:txBody>
+                  <a:tcPr marL="50800" marR="50800" marT="50800" marB="50800">
+                    <a:lnL w="6350" cap="flat" cmpd="sng" algn="ctr">
+                      <a:solidFill>
+                        <a:srgbClr val="E2E7EE"/>
+                      </a:solidFill>
+                      <a:prstDash val="solid"/>
+                      <a:round/>
+                      <a:headEnd type="none" w="med" len="med"/>
+                      <a:tailEnd type="none" w="med" len="med"/>
+                    </a:lnL>
+                    <a:lnR w="6350" cap="flat" cmpd="sng" algn="ctr">
+                      <a:solidFill>
+                        <a:srgbClr val="E2E7EE"/>
+                      </a:solidFill>
+                      <a:prstDash val="solid"/>
+                      <a:round/>
+                      <a:headEnd type="none" w="med" len="med"/>
+                      <a:tailEnd type="none" w="med" len="med"/>
+                    </a:lnR>
+                    <a:lnT w="6350" cap="flat" cmpd="sng" algn="ctr">
+                      <a:solidFill>
+                        <a:srgbClr val="E2E7EE"/>
+                      </a:solidFill>
+                      <a:prstDash val="solid"/>
+                      <a:round/>
+                      <a:headEnd type="none" w="med" len="med"/>
+                      <a:tailEnd type="none" w="med" len="med"/>
+                    </a:lnT>
+                    <a:lnB w="6350" cap="flat" cmpd="sng" algn="ctr">
+                      <a:solidFill>
+                        <a:srgbClr val="E2E7EE"/>
+                      </a:solidFill>
+                      <a:prstDash val="solid"/>
+                      <a:round/>
+                      <a:headEnd type="none" w="med" len="med"/>
+                      <a:tailEnd type="none" w="med" len="med"/>
+                    </a:lnB>
+                  </a:tcPr>
+                </a:tc>
+                <a:tc>
+                  <a:txBody>
+                    <a:bodyPr/>
+                    <a:lstStyle/>
+                    <a:p>
+                      <a:pPr indent="0" marL="0">
+                        <a:buNone/>
+                      </a:pPr>
+                      <a:r>
+                        <a:rPr lang="en-US" sz="900" dirty="0">
+                          <a:solidFill>
+                            <a:srgbClr val="14181F"/>
+                          </a:solidFill>
+                        </a:rPr>
+                        <a:t>nos</a:t>
+                      </a:r>
+                      <a:endParaRPr lang="en-US" sz="900" dirty="0"/>
+                    </a:p>
+                  </a:txBody>
+                  <a:tcPr marL="50800" marR="50800" marT="50800" marB="50800">
+                    <a:lnL w="6350" cap="flat" cmpd="sng" algn="ctr">
+                      <a:solidFill>
+                        <a:srgbClr val="E2E7EE"/>
+                      </a:solidFill>
+                      <a:prstDash val="solid"/>
+                      <a:round/>
+                      <a:headEnd type="none" w="med" len="med"/>
+                      <a:tailEnd type="none" w="med" len="med"/>
+                    </a:lnL>
+                    <a:lnR w="6350" cap="flat" cmpd="sng" algn="ctr">
+                      <a:solidFill>
+                        <a:srgbClr val="E2E7EE"/>
+                      </a:solidFill>
+                      <a:prstDash val="solid"/>
+                      <a:round/>
+                      <a:headEnd type="none" w="med" len="med"/>
+                      <a:tailEnd type="none" w="med" len="med"/>
+                    </a:lnR>
+                    <a:lnT w="6350" cap="flat" cmpd="sng" algn="ctr">
+                      <a:solidFill>
+                        <a:srgbClr val="E2E7EE"/>
+                      </a:solidFill>
+                      <a:prstDash val="solid"/>
+                      <a:round/>
+                      <a:headEnd type="none" w="med" len="med"/>
+                      <a:tailEnd type="none" w="med" len="med"/>
+                    </a:lnT>
+                    <a:lnB w="6350" cap="flat" cmpd="sng" algn="ctr">
+                      <a:solidFill>
+                        <a:srgbClr val="E2E7EE"/>
+                      </a:solidFill>
+                      <a:prstDash val="solid"/>
+                      <a:round/>
+                      <a:headEnd type="none" w="med" len="med"/>
+                      <a:tailEnd type="none" w="med" len="med"/>
+                    </a:lnB>
+                  </a:tcPr>
+                </a:tc>
+                <a:tc>
+                  <a:txBody>
+                    <a:bodyPr/>
+                    <a:lstStyle/>
+                    <a:p>
+                      <a:pPr indent="0" marL="0">
+                        <a:buNone/>
+                      </a:pPr>
+                      <a:r>
+                        <a:rPr lang="en-US" sz="900" dirty="0">
+                          <a:solidFill>
+                            <a:srgbClr val="14181F"/>
+                          </a:solidFill>
+                        </a:rPr>
+                        <a:t>2025-11-19</a:t>
+                      </a:r>
+                      <a:endParaRPr lang="en-US" sz="900" dirty="0"/>
+                    </a:p>
+                  </a:txBody>
+                  <a:tcPr marL="50800" marR="50800" marT="50800" marB="50800">
+                    <a:lnL w="6350" cap="flat" cmpd="sng" algn="ctr">
+                      <a:solidFill>
+                        <a:srgbClr val="E2E7EE"/>
+                      </a:solidFill>
+                      <a:prstDash val="solid"/>
+                      <a:round/>
+                      <a:headEnd type="none" w="med" len="med"/>
+                      <a:tailEnd type="none" w="med" len="med"/>
+                    </a:lnL>
+                    <a:lnR w="6350" cap="flat" cmpd="sng" algn="ctr">
+                      <a:solidFill>
+                        <a:srgbClr val="E2E7EE"/>
+                      </a:solidFill>
+                      <a:prstDash val="solid"/>
+                      <a:round/>
+                      <a:headEnd type="none" w="med" len="med"/>
+                      <a:tailEnd type="none" w="med" len="med"/>
+                    </a:lnR>
+                    <a:lnT w="6350" cap="flat" cmpd="sng" algn="ctr">
+                      <a:solidFill>
+                        <a:srgbClr val="E2E7EE"/>
+                      </a:solidFill>
+                      <a:prstDash val="solid"/>
+                      <a:round/>
+                      <a:headEnd type="none" w="med" len="med"/>
+                      <a:tailEnd type="none" w="med" len="med"/>
+                    </a:lnT>
+                    <a:lnB w="6350" cap="flat" cmpd="sng" algn="ctr">
+                      <a:solidFill>
+                        <a:srgbClr val="E2E7EE"/>
+                      </a:solidFill>
+                      <a:prstDash val="solid"/>
+                      <a:round/>
+                      <a:headEnd type="none" w="med" len="med"/>
+                      <a:tailEnd type="none" w="med" len="med"/>
+                    </a:lnB>
+                  </a:tcPr>
+                </a:tc>
+                <a:tc>
+                  <a:txBody>
+                    <a:bodyPr/>
+                    <a:lstStyle/>
+                    <a:p>
+                      <a:pPr indent="0" marL="0">
+                        <a:buNone/>
+                      </a:pPr>
+                      <a:r>
+                        <a:rPr lang="en-US" sz="900" dirty="0">
+                          <a:solidFill>
+                            <a:srgbClr val="14181F"/>
+                          </a:solidFill>
+                        </a:rPr>
+                        <a:t>Not Ordered</a:t>
+                      </a:r>
+                      <a:endParaRPr lang="en-US" sz="900" dirty="0"/>
+                    </a:p>
+                  </a:txBody>
+                  <a:tcPr marL="50800" marR="50800" marT="50800" marB="50800">
+                    <a:lnL w="6350" cap="flat" cmpd="sng" algn="ctr">
+                      <a:solidFill>
+                        <a:srgbClr val="E2E7EE"/>
+                      </a:solidFill>
+                      <a:prstDash val="solid"/>
+                      <a:round/>
+                      <a:headEnd type="none" w="med" len="med"/>
+                      <a:tailEnd type="none" w="med" len="med"/>
+                    </a:lnL>
+                    <a:lnR w="6350" cap="flat" cmpd="sng" algn="ctr">
+                      <a:solidFill>
+                        <a:srgbClr val="E2E7EE"/>
+                      </a:solidFill>
+                      <a:prstDash val="solid"/>
+                      <a:round/>
+                      <a:headEnd type="none" w="med" len="med"/>
+                      <a:tailEnd type="none" w="med" len="med"/>
+                    </a:lnR>
+                    <a:lnT w="6350" cap="flat" cmpd="sng" algn="ctr">
+                      <a:solidFill>
+                        <a:srgbClr val="E2E7EE"/>
+                      </a:solidFill>
+                      <a:prstDash val="solid"/>
+                      <a:round/>
+                      <a:headEnd type="none" w="med" len="med"/>
+                      <a:tailEnd type="none" w="med" len="med"/>
+                    </a:lnT>
+                    <a:lnB w="6350" cap="flat" cmpd="sng" algn="ctr">
+                      <a:solidFill>
+                        <a:srgbClr val="E2E7EE"/>
+                      </a:solidFill>
+                      <a:prstDash val="solid"/>
+                      <a:round/>
+                      <a:headEnd type="none" w="med" len="med"/>
+                      <a:tailEnd type="none" w="med" len="med"/>
+                    </a:lnB>
+                  </a:tcPr>
+                </a:tc>
+              </a:tr>
+              <a:tr h="0">
+                <a:tc>
+                  <a:txBody>
+                    <a:bodyPr/>
+                    <a:lstStyle/>
+                    <a:p>
+                      <a:pPr indent="0" marL="0">
+                        <a:buNone/>
+                      </a:pPr>
+                      <a:r>
+                        <a:rPr lang="en-US" sz="900" dirty="0">
+                          <a:solidFill>
+                            <a:srgbClr val="14181F"/>
+                          </a:solidFill>
+                        </a:rPr>
+                        <a:t>AV equipment — VC systems, displays, sound bars</a:t>
+                      </a:r>
+                      <a:endParaRPr lang="en-US" sz="900" dirty="0"/>
+                    </a:p>
+                  </a:txBody>
+                  <a:tcPr marL="50800" marR="50800" marT="50800" marB="50800">
+                    <a:lnL w="6350" cap="flat" cmpd="sng" algn="ctr">
+                      <a:solidFill>
+                        <a:srgbClr val="E2E7EE"/>
+                      </a:solidFill>
+                      <a:prstDash val="solid"/>
+                      <a:round/>
+                      <a:headEnd type="none" w="med" len="med"/>
+                      <a:tailEnd type="none" w="med" len="med"/>
+                    </a:lnL>
+                    <a:lnR w="6350" cap="flat" cmpd="sng" algn="ctr">
+                      <a:solidFill>
+                        <a:srgbClr val="E2E7EE"/>
+                      </a:solidFill>
+                      <a:prstDash val="solid"/>
+                      <a:round/>
+                      <a:headEnd type="none" w="med" len="med"/>
+                      <a:tailEnd type="none" w="med" len="med"/>
+                    </a:lnR>
+                    <a:lnT w="6350" cap="flat" cmpd="sng" algn="ctr">
+                      <a:solidFill>
+                        <a:srgbClr val="E2E7EE"/>
+                      </a:solidFill>
+                      <a:prstDash val="solid"/>
+                      <a:round/>
+                      <a:headEnd type="none" w="med" len="med"/>
+                      <a:tailEnd type="none" w="med" len="med"/>
+                    </a:lnT>
+                    <a:lnB w="6350" cap="flat" cmpd="sng" algn="ctr">
+                      <a:solidFill>
+                        <a:srgbClr val="E2E7EE"/>
+                      </a:solidFill>
+                      <a:prstDash val="solid"/>
+                      <a:round/>
+                      <a:headEnd type="none" w="med" len="med"/>
+                      <a:tailEnd type="none" w="med" len="med"/>
+                    </a:lnB>
+                  </a:tcPr>
+                </a:tc>
+                <a:tc>
+                  <a:txBody>
+                    <a:bodyPr/>
+                    <a:lstStyle/>
+                    <a:p>
+                      <a:pPr indent="0" marL="0">
+                        <a:buNone/>
+                      </a:pPr>
+                      <a:r>
+                        <a:rPr lang="en-US" sz="900" dirty="0">
+                          <a:solidFill>
+                            <a:srgbClr val="14181F"/>
+                          </a:solidFill>
+                        </a:rPr>
+                        <a:t>nos</a:t>
+                      </a:r>
+                      <a:endParaRPr lang="en-US" sz="900" dirty="0"/>
+                    </a:p>
+                  </a:txBody>
+                  <a:tcPr marL="50800" marR="50800" marT="50800" marB="50800">
+                    <a:lnL w="6350" cap="flat" cmpd="sng" algn="ctr">
+                      <a:solidFill>
+                        <a:srgbClr val="E2E7EE"/>
+                      </a:solidFill>
+                      <a:prstDash val="solid"/>
+                      <a:round/>
+                      <a:headEnd type="none" w="med" len="med"/>
+                      <a:tailEnd type="none" w="med" len="med"/>
+                    </a:lnL>
+                    <a:lnR w="6350" cap="flat" cmpd="sng" algn="ctr">
+                      <a:solidFill>
+                        <a:srgbClr val="E2E7EE"/>
+                      </a:solidFill>
+                      <a:prstDash val="solid"/>
+                      <a:round/>
+                      <a:headEnd type="none" w="med" len="med"/>
+                      <a:tailEnd type="none" w="med" len="med"/>
+                    </a:lnR>
+                    <a:lnT w="6350" cap="flat" cmpd="sng" algn="ctr">
+                      <a:solidFill>
+                        <a:srgbClr val="E2E7EE"/>
+                      </a:solidFill>
+                      <a:prstDash val="solid"/>
+                      <a:round/>
+                      <a:headEnd type="none" w="med" len="med"/>
+                      <a:tailEnd type="none" w="med" len="med"/>
+                    </a:lnT>
+                    <a:lnB w="6350" cap="flat" cmpd="sng" algn="ctr">
+                      <a:solidFill>
+                        <a:srgbClr val="E2E7EE"/>
+                      </a:solidFill>
+                      <a:prstDash val="solid"/>
+                      <a:round/>
+                      <a:headEnd type="none" w="med" len="med"/>
+                      <a:tailEnd type="none" w="med" len="med"/>
+                    </a:lnB>
+                  </a:tcPr>
+                </a:tc>
+                <a:tc>
+                  <a:txBody>
+                    <a:bodyPr/>
+                    <a:lstStyle/>
+                    <a:p>
+                      <a:pPr indent="0" marL="0">
+                        <a:buNone/>
+                      </a:pPr>
+                      <a:r>
+                        <a:rPr lang="en-US" sz="900" dirty="0">
+                          <a:solidFill>
+                            <a:srgbClr val="14181F"/>
+                          </a:solidFill>
+                        </a:rPr>
+                        <a:t>2025-11-19</a:t>
+                      </a:r>
+                      <a:endParaRPr lang="en-US" sz="900" dirty="0"/>
+                    </a:p>
+                  </a:txBody>
+                  <a:tcPr marL="50800" marR="50800" marT="50800" marB="50800">
+                    <a:lnL w="6350" cap="flat" cmpd="sng" algn="ctr">
+                      <a:solidFill>
+                        <a:srgbClr val="E2E7EE"/>
+                      </a:solidFill>
+                      <a:prstDash val="solid"/>
+                      <a:round/>
+                      <a:headEnd type="none" w="med" len="med"/>
+                      <a:tailEnd type="none" w="med" len="med"/>
+                    </a:lnL>
+                    <a:lnR w="6350" cap="flat" cmpd="sng" algn="ctr">
+                      <a:solidFill>
+                        <a:srgbClr val="E2E7EE"/>
+                      </a:solidFill>
+                      <a:prstDash val="solid"/>
+                      <a:round/>
+                      <a:headEnd type="none" w="med" len="med"/>
+                      <a:tailEnd type="none" w="med" len="med"/>
+                    </a:lnR>
+                    <a:lnT w="6350" cap="flat" cmpd="sng" algn="ctr">
+                      <a:solidFill>
+                        <a:srgbClr val="E2E7EE"/>
+                      </a:solidFill>
+                      <a:prstDash val="solid"/>
+                      <a:round/>
+                      <a:headEnd type="none" w="med" len="med"/>
+                      <a:tailEnd type="none" w="med" len="med"/>
+                    </a:lnT>
+                    <a:lnB w="6350" cap="flat" cmpd="sng" algn="ctr">
+                      <a:solidFill>
+                        <a:srgbClr val="E2E7EE"/>
+                      </a:solidFill>
+                      <a:prstDash val="solid"/>
+                      <a:round/>
+                      <a:headEnd type="none" w="med" len="med"/>
+                      <a:tailEnd type="none" w="med" len="med"/>
+                    </a:lnB>
+                  </a:tcPr>
+                </a:tc>
+                <a:tc>
+                  <a:txBody>
+                    <a:bodyPr/>
+                    <a:lstStyle/>
+                    <a:p>
+                      <a:pPr indent="0" marL="0">
+                        <a:buNone/>
+                      </a:pPr>
+                      <a:r>
+                        <a:rPr lang="en-US" sz="900" dirty="0">
+                          <a:solidFill>
+                            <a:srgbClr val="14181F"/>
+                          </a:solidFill>
+                        </a:rPr>
+                        <a:t>Not Ordered</a:t>
+                      </a:r>
+                      <a:endParaRPr lang="en-US" sz="900" dirty="0"/>
+                    </a:p>
+                  </a:txBody>
+                  <a:tcPr marL="50800" marR="50800" marT="50800" marB="50800">
+                    <a:lnL w="6350" cap="flat" cmpd="sng" algn="ctr">
+                      <a:solidFill>
+                        <a:srgbClr val="E2E7EE"/>
+                      </a:solidFill>
+                      <a:prstDash val="solid"/>
+                      <a:round/>
+                      <a:headEnd type="none" w="med" len="med"/>
+                      <a:tailEnd type="none" w="med" len="med"/>
+                    </a:lnL>
+                    <a:lnR w="6350" cap="flat" cmpd="sng" algn="ctr">
+                      <a:solidFill>
+                        <a:srgbClr val="E2E7EE"/>
+                      </a:solidFill>
+                      <a:prstDash val="solid"/>
+                      <a:round/>
+                      <a:headEnd type="none" w="med" len="med"/>
+                      <a:tailEnd type="none" w="med" len="med"/>
+                    </a:lnR>
+                    <a:lnT w="6350" cap="flat" cmpd="sng" algn="ctr">
+                      <a:solidFill>
+                        <a:srgbClr val="E2E7EE"/>
+                      </a:solidFill>
+                      <a:prstDash val="solid"/>
+                      <a:round/>
+                      <a:headEnd type="none" w="med" len="med"/>
+                      <a:tailEnd type="none" w="med" len="med"/>
+                    </a:lnT>
+                    <a:lnB w="6350" cap="flat" cmpd="sng" algn="ctr">
+                      <a:solidFill>
+                        <a:srgbClr val="E2E7EE"/>
+                      </a:solidFill>
+                      <a:prstDash val="solid"/>
+                      <a:round/>
+                      <a:headEnd type="none" w="med" len="med"/>
+                      <a:tailEnd type="none" w="med" len="med"/>
+                    </a:lnB>
+                  </a:tcPr>
+                </a:tc>
+              </a:tr>
+              <a:tr h="0">
+                <a:tc>
+                  <a:txBody>
+                    <a:bodyPr/>
+                    <a:lstStyle/>
+                    <a:p>
+                      <a:pPr indent="0" marL="0">
+                        <a:buNone/>
+                      </a:pPr>
+                      <a:r>
+                        <a:rPr lang="en-US" sz="900" dirty="0">
+                          <a:solidFill>
+                            <a:srgbClr val="14181F"/>
+                          </a:solidFill>
+                        </a:rPr>
+                        <a:t>Pantry appliances</a:t>
+                      </a:r>
+                      <a:endParaRPr lang="en-US" sz="900" dirty="0"/>
+                    </a:p>
+                  </a:txBody>
+                  <a:tcPr marL="50800" marR="50800" marT="50800" marB="50800">
+                    <a:lnL w="6350" cap="flat" cmpd="sng" algn="ctr">
+                      <a:solidFill>
+                        <a:srgbClr val="E2E7EE"/>
+                      </a:solidFill>
+                      <a:prstDash val="solid"/>
+                      <a:round/>
+                      <a:headEnd type="none" w="med" len="med"/>
+                      <a:tailEnd type="none" w="med" len="med"/>
+                    </a:lnL>
+                    <a:lnR w="6350" cap="flat" cmpd="sng" algn="ctr">
+                      <a:solidFill>
+                        <a:srgbClr val="E2E7EE"/>
+                      </a:solidFill>
+                      <a:prstDash val="solid"/>
+                      <a:round/>
+                      <a:headEnd type="none" w="med" len="med"/>
+                      <a:tailEnd type="none" w="med" len="med"/>
+                    </a:lnR>
+                    <a:lnT w="6350" cap="flat" cmpd="sng" algn="ctr">
+                      <a:solidFill>
+                        <a:srgbClr val="E2E7EE"/>
+                      </a:solidFill>
+                      <a:prstDash val="solid"/>
+                      <a:round/>
+                      <a:headEnd type="none" w="med" len="med"/>
+                      <a:tailEnd type="none" w="med" len="med"/>
+                    </a:lnT>
+                    <a:lnB w="6350" cap="flat" cmpd="sng" algn="ctr">
+                      <a:solidFill>
+                        <a:srgbClr val="E2E7EE"/>
+                      </a:solidFill>
+                      <a:prstDash val="solid"/>
+                      <a:round/>
+                      <a:headEnd type="none" w="med" len="med"/>
+                      <a:tailEnd type="none" w="med" len="med"/>
+                    </a:lnB>
+                  </a:tcPr>
+                </a:tc>
+                <a:tc>
+                  <a:txBody>
+                    <a:bodyPr/>
+                    <a:lstStyle/>
+                    <a:p>
+                      <a:pPr indent="0" marL="0">
+                        <a:buNone/>
+                      </a:pPr>
+                      <a:r>
+                        <a:rPr lang="en-US" sz="900" dirty="0">
+                          <a:solidFill>
+                            <a:srgbClr val="14181F"/>
+                          </a:solidFill>
+                        </a:rPr>
+                        <a:t>nos</a:t>
+                      </a:r>
+                      <a:endParaRPr lang="en-US" sz="900" dirty="0"/>
+                    </a:p>
+                  </a:txBody>
+                  <a:tcPr marL="50800" marR="50800" marT="50800" marB="50800">
+                    <a:lnL w="6350" cap="flat" cmpd="sng" algn="ctr">
+                      <a:solidFill>
+                        <a:srgbClr val="E2E7EE"/>
+                      </a:solidFill>
+                      <a:prstDash val="solid"/>
+                      <a:round/>
+                      <a:headEnd type="none" w="med" len="med"/>
+                      <a:tailEnd type="none" w="med" len="med"/>
+                    </a:lnL>
+                    <a:lnR w="6350" cap="flat" cmpd="sng" algn="ctr">
+                      <a:solidFill>
+                        <a:srgbClr val="E2E7EE"/>
+                      </a:solidFill>
+                      <a:prstDash val="solid"/>
+                      <a:round/>
+                      <a:headEnd type="none" w="med" len="med"/>
+                      <a:tailEnd type="none" w="med" len="med"/>
+                    </a:lnR>
+                    <a:lnT w="6350" cap="flat" cmpd="sng" algn="ctr">
+                      <a:solidFill>
+                        <a:srgbClr val="E2E7EE"/>
+                      </a:solidFill>
+                      <a:prstDash val="solid"/>
+                      <a:round/>
+                      <a:headEnd type="none" w="med" len="med"/>
+                      <a:tailEnd type="none" w="med" len="med"/>
+                    </a:lnT>
+                    <a:lnB w="6350" cap="flat" cmpd="sng" algn="ctr">
+                      <a:solidFill>
+                        <a:srgbClr val="E2E7EE"/>
+                      </a:solidFill>
+                      <a:prstDash val="solid"/>
+                      <a:round/>
+                      <a:headEnd type="none" w="med" len="med"/>
+                      <a:tailEnd type="none" w="med" len="med"/>
+                    </a:lnB>
+                  </a:tcPr>
+                </a:tc>
+                <a:tc>
+                  <a:txBody>
+                    <a:bodyPr/>
+                    <a:lstStyle/>
+                    <a:p>
+                      <a:pPr indent="0" marL="0">
+                        <a:buNone/>
+                      </a:pPr>
+                      <a:r>
+                        <a:rPr lang="en-US" sz="900" dirty="0">
+                          <a:solidFill>
+                            <a:srgbClr val="14181F"/>
+                          </a:solidFill>
+                        </a:rPr>
+                        <a:t>—</a:t>
+                      </a:r>
+                      <a:endParaRPr lang="en-US" sz="900" dirty="0"/>
+                    </a:p>
+                  </a:txBody>
+                  <a:tcPr marL="50800" marR="50800" marT="50800" marB="50800">
+                    <a:lnL w="6350" cap="flat" cmpd="sng" algn="ctr">
+                      <a:solidFill>
+                        <a:srgbClr val="E2E7EE"/>
+                      </a:solidFill>
+                      <a:prstDash val="solid"/>
+                      <a:round/>
+                      <a:headEnd type="none" w="med" len="med"/>
+                      <a:tailEnd type="none" w="med" len="med"/>
+                    </a:lnL>
+                    <a:lnR w="6350" cap="flat" cmpd="sng" algn="ctr">
+                      <a:solidFill>
+                        <a:srgbClr val="E2E7EE"/>
+                      </a:solidFill>
+                      <a:prstDash val="solid"/>
+                      <a:round/>
+                      <a:headEnd type="none" w="med" len="med"/>
+                      <a:tailEnd type="none" w="med" len="med"/>
+                    </a:lnR>
+                    <a:lnT w="6350" cap="flat" cmpd="sng" algn="ctr">
+                      <a:solidFill>
+                        <a:srgbClr val="E2E7EE"/>
+                      </a:solidFill>
+                      <a:prstDash val="solid"/>
+                      <a:round/>
+                      <a:headEnd type="none" w="med" len="med"/>
+                      <a:tailEnd type="none" w="med" len="med"/>
+                    </a:lnT>
+                    <a:lnB w="6350" cap="flat" cmpd="sng" algn="ctr">
+                      <a:solidFill>
+                        <a:srgbClr val="E2E7EE"/>
+                      </a:solidFill>
+                      <a:prstDash val="solid"/>
+                      <a:round/>
+                      <a:headEnd type="none" w="med" len="med"/>
+                      <a:tailEnd type="none" w="med" len="med"/>
+                    </a:lnB>
+                  </a:tcPr>
+                </a:tc>
+                <a:tc>
+                  <a:txBody>
+                    <a:bodyPr/>
+                    <a:lstStyle/>
+                    <a:p>
+                      <a:pPr indent="0" marL="0">
+                        <a:buNone/>
+                      </a:pPr>
+                      <a:r>
+                        <a:rPr lang="en-US" sz="900" dirty="0">
+                          <a:solidFill>
+                            <a:srgbClr val="14181F"/>
+                          </a:solidFill>
+                        </a:rPr>
+                        <a:t>Not Ordered</a:t>
+                      </a:r>
+                      <a:endParaRPr lang="en-US" sz="900" dirty="0"/>
+                    </a:p>
+                  </a:txBody>
+                  <a:tcPr marL="50800" marR="50800" marT="50800" marB="50800">
+                    <a:lnL w="6350" cap="flat" cmpd="sng" algn="ctr">
+                      <a:solidFill>
+                        <a:srgbClr val="E2E7EE"/>
+                      </a:solidFill>
+                      <a:prstDash val="solid"/>
+                      <a:round/>
+                      <a:headEnd type="none" w="med" len="med"/>
+                      <a:tailEnd type="none" w="med" len="med"/>
+                    </a:lnL>
+                    <a:lnR w="6350" cap="flat" cmpd="sng" algn="ctr">
+                      <a:solidFill>
+                        <a:srgbClr val="E2E7EE"/>
+                      </a:solidFill>
+                      <a:prstDash val="solid"/>
+                      <a:round/>
+                      <a:headEnd type="none" w="med" len="med"/>
+                      <a:tailEnd type="none" w="med" len="med"/>
+                    </a:lnR>
+                    <a:lnT w="6350" cap="flat" cmpd="sng" algn="ctr">
+                      <a:solidFill>
+                        <a:srgbClr val="E2E7EE"/>
+                      </a:solidFill>
+                      <a:prstDash val="solid"/>
+                      <a:round/>
+                      <a:headEnd type="none" w="med" len="med"/>
+                      <a:tailEnd type="none" w="med" len="med"/>
+                    </a:lnT>
+                    <a:lnB w="6350" cap="flat" cmpd="sng" algn="ctr">
+                      <a:solidFill>
+                        <a:srgbClr val="E2E7EE"/>
+                      </a:solidFill>
+                      <a:prstDash val="solid"/>
+                      <a:round/>
+                      <a:headEnd type="none" w="med" len="med"/>
+                      <a:tailEnd type="none" w="med" len="med"/>
+                    </a:lnB>
+                  </a:tcPr>
+                </a:tc>
+              </a:tr>
+              <a:tr h="0">
+                <a:tc>
+                  <a:txBody>
+                    <a:bodyPr/>
+                    <a:lstStyle/>
+                    <a:p>
+                      <a:pPr indent="0" marL="0">
+                        <a:buNone/>
+                      </a:pPr>
+                      <a:r>
+                        <a:rPr lang="en-US" sz="900" dirty="0">
+                          <a:solidFill>
+                            <a:srgbClr val="14181F"/>
+                          </a:solidFill>
+                        </a:rPr>
+                        <a:t>Client-supplied loose furniture &amp; artefacts</a:t>
+                      </a:r>
+                      <a:endParaRPr lang="en-US" sz="900" dirty="0"/>
+                    </a:p>
+                  </a:txBody>
+                  <a:tcPr marL="50800" marR="50800" marT="50800" marB="50800">
+                    <a:lnL w="6350" cap="flat" cmpd="sng" algn="ctr">
+                      <a:solidFill>
+                        <a:srgbClr val="E2E7EE"/>
+                      </a:solidFill>
+                      <a:prstDash val="solid"/>
+                      <a:round/>
+                      <a:headEnd type="none" w="med" len="med"/>
+                      <a:tailEnd type="none" w="med" len="med"/>
+                    </a:lnL>
+                    <a:lnR w="6350" cap="flat" cmpd="sng" algn="ctr">
+                      <a:solidFill>
+                        <a:srgbClr val="E2E7EE"/>
+                      </a:solidFill>
+                      <a:prstDash val="solid"/>
+                      <a:round/>
+                      <a:headEnd type="none" w="med" len="med"/>
+                      <a:tailEnd type="none" w="med" len="med"/>
+                    </a:lnR>
+                    <a:lnT w="6350" cap="flat" cmpd="sng" algn="ctr">
+                      <a:solidFill>
+                        <a:srgbClr val="E2E7EE"/>
+                      </a:solidFill>
+                      <a:prstDash val="solid"/>
+                      <a:round/>
+                      <a:headEnd type="none" w="med" len="med"/>
+                      <a:tailEnd type="none" w="med" len="med"/>
+                    </a:lnT>
+                    <a:lnB w="6350" cap="flat" cmpd="sng" algn="ctr">
+                      <a:solidFill>
+                        <a:srgbClr val="E2E7EE"/>
+                      </a:solidFill>
+                      <a:prstDash val="solid"/>
+                      <a:round/>
+                      <a:headEnd type="none" w="med" len="med"/>
+                      <a:tailEnd type="none" w="med" len="med"/>
+                    </a:lnB>
+                  </a:tcPr>
+                </a:tc>
+                <a:tc>
+                  <a:txBody>
+                    <a:bodyPr/>
+                    <a:lstStyle/>
+                    <a:p>
+                      <a:pPr indent="0" marL="0">
+                        <a:buNone/>
+                      </a:pPr>
+                      <a:r>
+                        <a:rPr lang="en-US" sz="900" dirty="0">
+                          <a:solidFill>
+                            <a:srgbClr val="14181F"/>
+                          </a:solidFill>
+                        </a:rPr>
+                        <a:t>nos</a:t>
+                      </a:r>
+                      <a:endParaRPr lang="en-US" sz="900" dirty="0"/>
+                    </a:p>
+                  </a:txBody>
+                  <a:tcPr marL="50800" marR="50800" marT="50800" marB="50800">
+                    <a:lnL w="6350" cap="flat" cmpd="sng" algn="ctr">
+                      <a:solidFill>
+                        <a:srgbClr val="E2E7EE"/>
+                      </a:solidFill>
+                      <a:prstDash val="solid"/>
+                      <a:round/>
+                      <a:headEnd type="none" w="med" len="med"/>
+                      <a:tailEnd type="none" w="med" len="med"/>
+                    </a:lnL>
+                    <a:lnR w="6350" cap="flat" cmpd="sng" algn="ctr">
+                      <a:solidFill>
+                        <a:srgbClr val="E2E7EE"/>
+                      </a:solidFill>
+                      <a:prstDash val="solid"/>
+                      <a:round/>
+                      <a:headEnd type="none" w="med" len="med"/>
+                      <a:tailEnd type="none" w="med" len="med"/>
+                    </a:lnR>
+                    <a:lnT w="6350" cap="flat" cmpd="sng" algn="ctr">
+                      <a:solidFill>
+                        <a:srgbClr val="E2E7EE"/>
+                      </a:solidFill>
+                      <a:prstDash val="solid"/>
+                      <a:round/>
+                      <a:headEnd type="none" w="med" len="med"/>
+                      <a:tailEnd type="none" w="med" len="med"/>
+                    </a:lnT>
+                    <a:lnB w="6350" cap="flat" cmpd="sng" algn="ctr">
+                      <a:solidFill>
+                        <a:srgbClr val="E2E7EE"/>
+                      </a:solidFill>
+                      <a:prstDash val="solid"/>
+                      <a:round/>
+                      <a:headEnd type="none" w="med" len="med"/>
+                      <a:tailEnd type="none" w="med" len="med"/>
+                    </a:lnB>
+                  </a:tcPr>
+                </a:tc>
+                <a:tc>
+                  <a:txBody>
+                    <a:bodyPr/>
+                    <a:lstStyle/>
+                    <a:p>
+                      <a:pPr indent="0" marL="0">
+                        <a:buNone/>
+                      </a:pPr>
+                      <a:r>
+                        <a:rPr lang="en-US" sz="900" dirty="0">
+                          <a:solidFill>
+                            <a:srgbClr val="14181F"/>
+                          </a:solidFill>
+                        </a:rPr>
+                        <a:t>2025-12-22</a:t>
+                      </a:r>
+                      <a:endParaRPr lang="en-US" sz="900" dirty="0"/>
+                    </a:p>
+                  </a:txBody>
+                  <a:tcPr marL="50800" marR="50800" marT="50800" marB="50800">
+                    <a:lnL w="6350" cap="flat" cmpd="sng" algn="ctr">
+                      <a:solidFill>
+                        <a:srgbClr val="E2E7EE"/>
+                      </a:solidFill>
+                      <a:prstDash val="solid"/>
+                      <a:round/>
+                      <a:headEnd type="none" w="med" len="med"/>
+                      <a:tailEnd type="none" w="med" len="med"/>
+                    </a:lnL>
+                    <a:lnR w="6350" cap="flat" cmpd="sng" algn="ctr">
+                      <a:solidFill>
+                        <a:srgbClr val="E2E7EE"/>
+                      </a:solidFill>
+                      <a:prstDash val="solid"/>
+                      <a:round/>
+                      <a:headEnd type="none" w="med" len="med"/>
+                      <a:tailEnd type="none" w="med" len="med"/>
+                    </a:lnR>
+                    <a:lnT w="6350" cap="flat" cmpd="sng" algn="ctr">
+                      <a:solidFill>
+                        <a:srgbClr val="E2E7EE"/>
+                      </a:solidFill>
+                      <a:prstDash val="solid"/>
+                      <a:round/>
+                      <a:headEnd type="none" w="med" len="med"/>
+                      <a:tailEnd type="none" w="med" len="med"/>
+                    </a:lnT>
+                    <a:lnB w="6350" cap="flat" cmpd="sng" algn="ctr">
+                      <a:solidFill>
+                        <a:srgbClr val="E2E7EE"/>
+                      </a:solidFill>
+                      <a:prstDash val="solid"/>
+                      <a:round/>
+                      <a:headEnd type="none" w="med" len="med"/>
+                      <a:tailEnd type="none" w="med" len="med"/>
+                    </a:lnB>
+                  </a:tcPr>
+                </a:tc>
+                <a:tc>
+                  <a:txBody>
+                    <a:bodyPr/>
+                    <a:lstStyle/>
+                    <a:p>
+                      <a:pPr indent="0" marL="0">
+                        <a:buNone/>
+                      </a:pPr>
+                      <a:r>
+                        <a:rPr lang="en-US" sz="900" dirty="0">
+                          <a:solidFill>
+                            <a:srgbClr val="14181F"/>
+                          </a:solidFill>
+                        </a:rPr>
+                        <a:t>Not Ordered</a:t>
+                      </a:r>
+                      <a:endParaRPr lang="en-US" sz="900" dirty="0"/>
+                    </a:p>
+                  </a:txBody>
+                  <a:tcPr marL="50800" marR="50800" marT="50800" marB="50800">
+                    <a:lnL w="6350" cap="flat" cmpd="sng" algn="ctr">
+                      <a:solidFill>
+                        <a:srgbClr val="E2E7EE"/>
+                      </a:solidFill>
+                      <a:prstDash val="solid"/>
+                      <a:round/>
+                      <a:headEnd type="none" w="med" len="med"/>
+                      <a:tailEnd type="none" w="med" len="med"/>
+                    </a:lnL>
+                    <a:lnR w="6350" cap="flat" cmpd="sng" algn="ctr">
+                      <a:solidFill>
+                        <a:srgbClr val="E2E7EE"/>
+                      </a:solidFill>
+                      <a:prstDash val="solid"/>
+                      <a:round/>
+                      <a:headEnd type="none" w="med" len="med"/>
+                      <a:tailEnd type="none" w="med" len="med"/>
+                    </a:lnR>
+                    <a:lnT w="6350" cap="flat" cmpd="sng" algn="ctr">
+                      <a:solidFill>
+                        <a:srgbClr val="E2E7EE"/>
+                      </a:solidFill>
+                      <a:prstDash val="solid"/>
+                      <a:round/>
+                      <a:headEnd type="none" w="med" len="med"/>
+                      <a:tailEnd type="none" w="med" len="med"/>
+                    </a:lnT>
+                    <a:lnB w="6350" cap="flat" cmpd="sng" algn="ctr">
+                      <a:solidFill>
+                        <a:srgbClr val="E2E7EE"/>
+                      </a:solidFill>
+                      <a:prstDash val="solid"/>
+                      <a:round/>
+                      <a:headEnd type="none" w="med" len="med"/>
+                      <a:tailEnd type="none" w="med" len="med"/>
+                    </a:lnB>
+                  </a:tcPr>
+                </a:tc>
+              </a:tr>
+            </a:tbl>
+          </a:graphicData>
+        </a:graphic>
+      </p:graphicFrame>
+    </p:spTree>
+  </p:cSld>
+  <p:clrMapOvr>
+    <a:masterClrMapping/>
+  </p:clrMapOvr>
+</p:sld>
+</file>
+
+<file path=ppt/slides/slide15.xml><?xml version="1.0" encoding="utf-8"?>
+<p:sld xmlns:a="http://schemas.openxmlformats.org/drawingml/2006/main" xmlns:r="http://schemas.openxmlformats.org/officeDocument/2006/relationships" xmlns:p="http://schemas.openxmlformats.org/presentationml/2006/main">
+  <p:cSld name="Slide 15">
+    <p:spTree>
+      <p:nvGrpSpPr>
+        <p:cNvPr id="1" name=""/>
+        <p:cNvGrpSpPr/>
+        <p:nvPr/>
+      </p:nvGrpSpPr>
+      <p:grpSpPr>
+        <a:xfrm>
+          <a:off x="0" y="0"/>
+          <a:ext cx="0" cy="0"/>
+          <a:chOff x="0" y="0"/>
+          <a:chExt cx="0" cy="0"/>
+        </a:xfrm>
+      </p:grpSpPr>
+      <p:sp>
+        <p:nvSpPr>
+          <p:cNvPr id="2" name="Shape 0"/>
+          <p:cNvSpPr/>
+          <p:nvPr/>
+        </p:nvSpPr>
+        <p:spPr>
+          <a:xfrm>
+            <a:off x="0" y="0"/>
+            <a:ext cx="12188952" cy="54864"/>
+          </a:xfrm>
+          <a:prstGeom prst="rect">
+            <a:avLst/>
+          </a:prstGeom>
+          <a:solidFill>
+            <a:srgbClr val="0F6FFF"/>
+          </a:solidFill>
+          <a:ln/>
+        </p:spPr>
+      </p:sp>
+      <p:sp>
+        <p:nvSpPr>
+          <p:cNvPr id="3" name="Text 1"/>
+          <p:cNvSpPr/>
+          <p:nvPr/>
+        </p:nvSpPr>
+        <p:spPr>
+          <a:xfrm>
+            <a:off x="457200" y="274320"/>
+            <a:ext cx="11247120" cy="457200"/>
+          </a:xfrm>
+          <a:prstGeom prst="rect">
+            <a:avLst/>
+          </a:prstGeom>
+          <a:noFill/>
+          <a:ln/>
+        </p:spPr>
+        <p:txBody>
+          <a:bodyPr wrap="square" rtlCol="0" anchor="ctr"/>
+          <a:lstStyle/>
+          <a:p>
+            <a:pPr indent="0" marL="0">
+              <a:buNone/>
+            </a:pPr>
+            <a:r>
+              <a:rPr lang="en-US" sz="2200" b="1" dirty="0">
+                <a:solidFill>
+                  <a:srgbClr val="14181F"/>
+                </a:solidFill>
+              </a:rPr>
               <a:t>Billing milestones</a:t>
             </a:r>
             <a:endParaRPr lang="en-US" sz="2200" dirty="0"/>
@@ -13632,7 +15250,7 @@
       </p:sp>
       <p:graphicFrame>
         <p:nvGraphicFramePr>
-          <p:cNvPr id="15" name="Table 0"/>
+          <p:cNvPr id="16" name="Table 0"/>
           <p:cNvGraphicFramePr>
             <a:graphicFrameLocks noGrp="1"/>
           </p:cNvGraphicFramePr>

--- a/sample-output/emirates-client-deck.pptx
+++ b/sample-output/emirates-client-deck.pptx
@@ -8365,7 +8365,7 @@
                             <a:srgbClr val="14181F"/>
                           </a:solidFill>
                         </a:rPr>
-                        <a:t>2025-10-13</a:t>
+                        <a:t>2025-10-14</a:t>
                       </a:r>
                       <a:endParaRPr lang="en-US" sz="900" dirty="0"/>
                     </a:p>
@@ -23700,7 +23700,7 @@
                             <a:srgbClr val="14181F"/>
                           </a:solidFill>
                         </a:rPr>
-                        <a:t>2025-09-29</a:t>
+                        <a:t>2025-10-03</a:t>
                       </a:r>
                       <a:endParaRPr lang="en-US" sz="900" dirty="0"/>
                     </a:p>
@@ -25581,7 +25581,7 @@
                             <a:srgbClr val="14181F"/>
                           </a:solidFill>
                         </a:rPr>
-                        <a:t>2025-10-17</a:t>
+                        <a:t>2025-10-21</a:t>
                       </a:r>
                       <a:endParaRPr lang="en-US" sz="900" dirty="0"/>
                     </a:p>
@@ -27342,7 +27342,7 @@
                             <a:srgbClr val="14181F"/>
                           </a:solidFill>
                         </a:rPr>
-                        <a:t>2025-09-25</a:t>
+                        <a:t>2025-06-06</a:t>
                       </a:r>
                       <a:endParaRPr lang="en-US" sz="900" dirty="0"/>
                     </a:p>
@@ -27576,7 +27576,7 @@
                             <a:srgbClr val="14181F"/>
                           </a:solidFill>
                         </a:rPr>
-                        <a:t>2025-12-23</a:t>
+                        <a:t>2025-06-13</a:t>
                       </a:r>
                       <a:endParaRPr lang="en-US" sz="900" dirty="0"/>
                     </a:p>
@@ -27810,7 +27810,7 @@
                             <a:srgbClr val="14181F"/>
                           </a:solidFill>
                         </a:rPr>
-                        <a:t>2025-12-23</a:t>
+                        <a:t>2025-09-27</a:t>
                       </a:r>
                       <a:endParaRPr lang="en-US" sz="900" dirty="0"/>
                     </a:p>
@@ -28044,7 +28044,7 @@
                             <a:srgbClr val="14181F"/>
                           </a:solidFill>
                         </a:rPr>
-                        <a:t>2025-10-09</a:t>
+                        <a:t>2025-06-18</a:t>
                       </a:r>
                       <a:endParaRPr lang="en-US" sz="900" dirty="0"/>
                     </a:p>
@@ -28278,7 +28278,7 @@
                             <a:srgbClr val="14181F"/>
                           </a:solidFill>
                         </a:rPr>
-                        <a:t>2025-10-23</a:t>
+                        <a:t>2025-07-01</a:t>
                       </a:r>
                       <a:endParaRPr lang="en-US" sz="900" dirty="0"/>
                     </a:p>
@@ -29214,7 +29214,7 @@
                             <a:srgbClr val="14181F"/>
                           </a:solidFill>
                         </a:rPr>
-                        <a:t>2025-11-06</a:t>
+                        <a:t>2025-07-03</a:t>
                       </a:r>
                       <a:endParaRPr lang="en-US" sz="900" dirty="0"/>
                     </a:p>
@@ -29448,7 +29448,7 @@
                             <a:srgbClr val="14181F"/>
                           </a:solidFill>
                         </a:rPr>
-                        <a:t>2025-12-23</a:t>
+                        <a:t>2025-12-18</a:t>
                       </a:r>
                       <a:endParaRPr lang="en-US" sz="900" dirty="0"/>
                     </a:p>
@@ -29682,7 +29682,7 @@
                             <a:srgbClr val="14181F"/>
                           </a:solidFill>
                         </a:rPr>
-                        <a:t>2025-10-16</a:t>
+                        <a:t>2025-10-06</a:t>
                       </a:r>
                       <a:endParaRPr lang="en-US" sz="900" dirty="0"/>
                     </a:p>
@@ -29916,7 +29916,7 @@
                             <a:srgbClr val="14181F"/>
                           </a:solidFill>
                         </a:rPr>
-                        <a:t>2025-10-23</a:t>
+                        <a:t>2025-10-16</a:t>
                       </a:r>
                       <a:endParaRPr lang="en-US" sz="900" dirty="0"/>
                     </a:p>
@@ -30977,7 +30977,7 @@
                             <a:srgbClr val="14181F"/>
                           </a:solidFill>
                         </a:rPr>
-                        <a:t>2025-10-09</a:t>
+                        <a:t>2025-06-28</a:t>
                       </a:r>
                       <a:endParaRPr lang="en-US" sz="900" dirty="0"/>
                     </a:p>
@@ -31211,7 +31211,7 @@
                             <a:srgbClr val="14181F"/>
                           </a:solidFill>
                         </a:rPr>
-                        <a:t>2025-10-23</a:t>
+                        <a:t>2025-10-04</a:t>
                       </a:r>
                       <a:endParaRPr lang="en-US" sz="900" dirty="0"/>
                     </a:p>
@@ -31445,7 +31445,7 @@
                             <a:srgbClr val="14181F"/>
                           </a:solidFill>
                         </a:rPr>
-                        <a:t>2025-10-23</a:t>
+                        <a:t>2025-10-18</a:t>
                       </a:r>
                       <a:endParaRPr lang="en-US" sz="900" dirty="0"/>
                     </a:p>
@@ -31679,7 +31679,7 @@
                             <a:srgbClr val="14181F"/>
                           </a:solidFill>
                         </a:rPr>
-                        <a:t>2025-10-23</a:t>
+                        <a:t>2025-10-11</a:t>
                       </a:r>
                       <a:endParaRPr lang="en-US" sz="900" dirty="0"/>
                     </a:p>
@@ -31913,7 +31913,7 @@
                             <a:srgbClr val="14181F"/>
                           </a:solidFill>
                         </a:rPr>
-                        <a:t>2025-10-23</a:t>
+                        <a:t>2025-10-04</a:t>
                       </a:r>
                       <a:endParaRPr lang="en-US" sz="900" dirty="0"/>
                     </a:p>
@@ -33317,7 +33317,7 @@
                             <a:srgbClr val="14181F"/>
                           </a:solidFill>
                         </a:rPr>
-                        <a:t>2025-10-30</a:t>
+                        <a:t>2025-10-20</a:t>
                       </a:r>
                       <a:endParaRPr lang="en-US" sz="900" dirty="0"/>
                     </a:p>
@@ -33551,7 +33551,7 @@
                             <a:srgbClr val="14181F"/>
                           </a:solidFill>
                         </a:rPr>
-                        <a:t>2025-10-30</a:t>
+                        <a:t>2025-10-27</a:t>
                       </a:r>
                       <a:endParaRPr lang="en-US" sz="900" dirty="0"/>
                     </a:p>
@@ -33785,7 +33785,7 @@
                             <a:srgbClr val="14181F"/>
                           </a:solidFill>
                         </a:rPr>
-                        <a:t>2025-10-30</a:t>
+                        <a:t>2025-11-03</a:t>
                       </a:r>
                       <a:endParaRPr lang="en-US" sz="900" dirty="0"/>
                     </a:p>
@@ -34019,7 +34019,7 @@
                             <a:srgbClr val="14181F"/>
                           </a:solidFill>
                         </a:rPr>
-                        <a:t>2025-10-13</a:t>
+                        <a:t>2025-10-09</a:t>
                       </a:r>
                       <a:endParaRPr lang="en-US" sz="900" dirty="0"/>
                     </a:p>
@@ -34612,7 +34612,7 @@
                             <a:srgbClr val="14181F"/>
                           </a:solidFill>
                         </a:rPr>
-                        <a:t>2025-10-12</a:t>
+                        <a:t>2025-10-16</a:t>
                       </a:r>
                       <a:endParaRPr lang="en-US" sz="900" dirty="0"/>
                     </a:p>
